--- a/courses/International-Finance-And-Securities/projects/fx-hedging/FX-Hedging-Project.pptx
+++ b/courses/International-Finance-And-Securities/projects/fx-hedging/FX-Hedging-Project.pptx
@@ -11,9 +11,11 @@
     <p:sldId id="256" r:id="rId2"/>
     <p:sldId id="257" r:id="rId3"/>
     <p:sldId id="258" r:id="rId4"/>
+    <p:sldId id="284" r:id="rId35"/>
     <p:sldId id="259" r:id="rId5"/>
     <p:sldId id="260" r:id="rId6"/>
     <p:sldId id="261" r:id="rId7"/>
+    <p:sldId id="285" r:id="rId36"/>
     <p:sldId id="262" r:id="rId8"/>
     <p:sldId id="263" r:id="rId9"/>
     <p:sldId id="264" r:id="rId10"/>
@@ -3229,7 +3231,7 @@
                   <a:srgbClr val="5A6B7A"/>
                 </a:solidFill>
               </a:rPr>
-              <a:t>A four-stage journey from business problem to executive recommendation</a:t>
+              <a:t>A six-stage journey from business problem to executive recommendation</a:t>
             </a:r>
             <a:endParaRPr lang="en-US" sz="1400" dirty="0"/>
           </a:p>
@@ -3312,7 +3314,7 @@
         <p:spPr>
           <a:xfrm>
             <a:off x="594360" y="3474720"/>
-            <a:ext cx="1828800" cy="749808"/>
+            <a:ext cx="1188720" cy="749808"/>
           </a:xfrm>
           <a:prstGeom prst="roundRect">
             <a:avLst>
@@ -3348,7 +3350,7 @@
         <p:spPr>
           <a:xfrm>
             <a:off x="594360" y="3474720"/>
-            <a:ext cx="1828800" cy="749808"/>
+            <a:ext cx="1188720" cy="749808"/>
           </a:xfrm>
           <a:prstGeom prst="rect">
             <a:avLst/>
@@ -3369,7 +3371,7 @@
                   <a:srgbClr val="FFFFFF"/>
                 </a:solidFill>
               </a:rPr>
-              <a:t>Stage 1</a:t>
+              <a:t>Stage 0</a:t>
             </a:r>
             <a:endParaRPr lang="en-US" sz="1200" dirty="0"/>
           </a:p>
@@ -3383,7 +3385,7 @@
                   <a:srgbClr val="FFFFFF"/>
                 </a:solidFill>
               </a:rPr>
-              <a:t>Memo</a:t>
+              <a:t>Repo</a:t>
             </a:r>
             <a:endParaRPr lang="en-US" sz="1200" dirty="0"/>
           </a:p>
@@ -3397,8 +3399,8 @@
         </p:nvSpPr>
         <p:spPr>
           <a:xfrm>
-            <a:off x="2697480" y="3474720"/>
-            <a:ext cx="1828800" cy="749808"/>
+            <a:off x="1984248" y="3474720"/>
+            <a:ext cx="1188720" cy="749808"/>
           </a:xfrm>
           <a:prstGeom prst="roundRect">
             <a:avLst>
@@ -3433,8 +3435,8 @@
         </p:nvSpPr>
         <p:spPr>
           <a:xfrm>
-            <a:off x="2697480" y="3474720"/>
-            <a:ext cx="1828800" cy="749808"/>
+            <a:off x="1984248" y="3474720"/>
+            <a:ext cx="1188720" cy="749808"/>
           </a:xfrm>
           <a:prstGeom prst="rect">
             <a:avLst/>
@@ -3455,7 +3457,7 @@
                   <a:srgbClr val="FFFFFF"/>
                 </a:solidFill>
               </a:rPr>
-              <a:t>Stage 2</a:t>
+              <a:t>Stage 1</a:t>
             </a:r>
             <a:endParaRPr lang="en-US" sz="1200" dirty="0"/>
           </a:p>
@@ -3469,7 +3471,7 @@
                   <a:srgbClr val="FFFFFF"/>
                 </a:solidFill>
               </a:rPr>
-              <a:t>Excel</a:t>
+              <a:t>Memo</a:t>
             </a:r>
             <a:endParaRPr lang="en-US" sz="1200" dirty="0"/>
           </a:p>
@@ -3483,8 +3485,8 @@
         </p:nvSpPr>
         <p:spPr>
           <a:xfrm>
-            <a:off x="4800600" y="3474720"/>
-            <a:ext cx="1828800" cy="749808"/>
+            <a:off x="3374136" y="3474720"/>
+            <a:ext cx="1188720" cy="749808"/>
           </a:xfrm>
           <a:prstGeom prst="roundRect">
             <a:avLst>
@@ -3519,8 +3521,8 @@
         </p:nvSpPr>
         <p:spPr>
           <a:xfrm>
-            <a:off x="4800600" y="3474720"/>
-            <a:ext cx="1828800" cy="749808"/>
+            <a:off x="3374136" y="3474720"/>
+            <a:ext cx="1188720" cy="749808"/>
           </a:xfrm>
           <a:prstGeom prst="rect">
             <a:avLst/>
@@ -3541,7 +3543,7 @@
                   <a:srgbClr val="FFFFFF"/>
                 </a:solidFill>
               </a:rPr>
-              <a:t>Stage 3</a:t>
+              <a:t>Stage 2</a:t>
             </a:r>
             <a:endParaRPr lang="en-US" sz="1200" dirty="0"/>
           </a:p>
@@ -3569,8 +3571,8 @@
         </p:nvSpPr>
         <p:spPr>
           <a:xfrm>
-            <a:off x="6903720" y="3474720"/>
-            <a:ext cx="1828800" cy="749808"/>
+            <a:off x="4764024" y="3474720"/>
+            <a:ext cx="1188720" cy="749808"/>
           </a:xfrm>
           <a:prstGeom prst="roundRect">
             <a:avLst>
@@ -3605,8 +3607,8 @@
         </p:nvSpPr>
         <p:spPr>
           <a:xfrm>
-            <a:off x="6903720" y="3474720"/>
-            <a:ext cx="1828800" cy="749808"/>
+            <a:off x="4764024" y="3474720"/>
+            <a:ext cx="1188720" cy="749808"/>
           </a:xfrm>
           <a:prstGeom prst="rect">
             <a:avLst/>
@@ -3627,6 +3629,92 @@
                   <a:srgbClr val="FFFFFF"/>
                 </a:solidFill>
               </a:rPr>
+              <a:t>Stage 3</a:t>
+            </a:r>
+            <a:endParaRPr lang="en-US" sz="1200" dirty="0"/>
+          </a:p>
+          <a:p>
+            <a:pPr marL="0" indent="0" algn="ctr">
+              <a:buNone/>
+            </a:pPr>
+            <a:r>
+              <a:rPr lang="en-US" sz="1200" b="1" dirty="0">
+                <a:solidFill>
+                  <a:srgbClr val="FFFFFF"/>
+                </a:solidFill>
+              </a:rPr>
+              <a:t>AI Build</a:t>
+            </a:r>
+            <a:endParaRPr lang="en-US" sz="1200" dirty="0"/>
+          </a:p>
+        </p:txBody>
+      </p:sp>
+      <p:sp>
+        <p:nvSpPr>
+          <p:cNvPr id="20" name="Shape 18"/>
+          <p:cNvSpPr/>
+          <p:nvPr/>
+        </p:nvSpPr>
+        <p:spPr>
+          <a:xfrm>
+            <a:off x="6153912" y="3474720"/>
+            <a:ext cx="1188720" cy="749808"/>
+          </a:xfrm>
+          <a:prstGeom prst="roundRect">
+            <a:avLst>
+              <a:gd name="adj" fmla="val 14634"/>
+            </a:avLst>
+          </a:prstGeom>
+          <a:solidFill>
+            <a:srgbClr val="5A6B7A">
+              <a:alpha val="75000"/>
+            </a:srgbClr>
+          </a:solidFill>
+          <a:ln w="12700">
+            <a:solidFill>
+              <a:srgbClr val="5A6B7A"/>
+            </a:solidFill>
+            <a:prstDash val="solid"/>
+          </a:ln>
+        </p:spPr>
+        <p:txBody>
+          <a:bodyPr/>
+          <a:lstStyle/>
+          <a:p>
+            <a:endParaRPr lang="en-US"/>
+          </a:p>
+        </p:txBody>
+      </p:sp>
+      <p:sp>
+        <p:nvSpPr>
+          <p:cNvPr id="21" name="Text 19"/>
+          <p:cNvSpPr/>
+          <p:nvPr/>
+        </p:nvSpPr>
+        <p:spPr>
+          <a:xfrm>
+            <a:off x="6153912" y="3474720"/>
+            <a:ext cx="1188720" cy="749808"/>
+          </a:xfrm>
+          <a:prstGeom prst="rect">
+            <a:avLst/>
+          </a:prstGeom>
+          <a:noFill/>
+          <a:ln/>
+        </p:spPr>
+        <p:txBody>
+          <a:bodyPr wrap="square" rtlCol="0" anchor="ctr"/>
+          <a:lstStyle/>
+          <a:p>
+            <a:pPr marL="0" indent="0" algn="ctr">
+              <a:buNone/>
+            </a:pPr>
+            <a:r>
+              <a:rPr lang="en-US" sz="1200" b="1" dirty="0">
+                <a:solidFill>
+                  <a:srgbClr val="FFFFFF"/>
+                </a:solidFill>
+              </a:rPr>
               <a:t>Stage 4</a:t>
             </a:r>
             <a:endParaRPr lang="en-US" sz="1200" dirty="0"/>
@@ -3641,7 +3729,93 @@
                   <a:srgbClr val="FFFFFF"/>
                 </a:solidFill>
               </a:rPr>
-              <a:t>Analysis</a:t>
+              <a:t>Live Data</a:t>
+            </a:r>
+            <a:endParaRPr lang="en-US" sz="1200" dirty="0"/>
+          </a:p>
+        </p:txBody>
+      </p:sp>
+      <p:sp>
+        <p:nvSpPr>
+          <p:cNvPr id="22" name="Shape 20"/>
+          <p:cNvSpPr/>
+          <p:nvPr/>
+        </p:nvSpPr>
+        <p:spPr>
+          <a:xfrm>
+            <a:off x="7543800" y="3474720"/>
+            <a:ext cx="1188720" cy="749808"/>
+          </a:xfrm>
+          <a:prstGeom prst="roundRect">
+            <a:avLst>
+              <a:gd name="adj" fmla="val 14634"/>
+            </a:avLst>
+          </a:prstGeom>
+          <a:solidFill>
+            <a:srgbClr val="B8975C">
+              <a:alpha val="75000"/>
+            </a:srgbClr>
+          </a:solidFill>
+          <a:ln w="12700">
+            <a:solidFill>
+              <a:srgbClr val="B8975C"/>
+            </a:solidFill>
+            <a:prstDash val="solid"/>
+          </a:ln>
+        </p:spPr>
+        <p:txBody>
+          <a:bodyPr/>
+          <a:lstStyle/>
+          <a:p>
+            <a:endParaRPr lang="en-US"/>
+          </a:p>
+        </p:txBody>
+      </p:sp>
+      <p:sp>
+        <p:nvSpPr>
+          <p:cNvPr id="23" name="Text 21"/>
+          <p:cNvSpPr/>
+          <p:nvPr/>
+        </p:nvSpPr>
+        <p:spPr>
+          <a:xfrm>
+            <a:off x="7543800" y="3474720"/>
+            <a:ext cx="1188720" cy="749808"/>
+          </a:xfrm>
+          <a:prstGeom prst="rect">
+            <a:avLst/>
+          </a:prstGeom>
+          <a:noFill/>
+          <a:ln/>
+        </p:spPr>
+        <p:txBody>
+          <a:bodyPr wrap="square" rtlCol="0" anchor="ctr"/>
+          <a:lstStyle/>
+          <a:p>
+            <a:pPr marL="0" indent="0" algn="ctr">
+              <a:buNone/>
+            </a:pPr>
+            <a:r>
+              <a:rPr lang="en-US" sz="1200" b="1" dirty="0">
+                <a:solidFill>
+                  <a:srgbClr val="FFFFFF"/>
+                </a:solidFill>
+              </a:rPr>
+              <a:t>Stage 5</a:t>
+            </a:r>
+            <a:endParaRPr lang="en-US" sz="1200" dirty="0"/>
+          </a:p>
+          <a:p>
+            <a:pPr marL="0" indent="0" algn="ctr">
+              <a:buNone/>
+            </a:pPr>
+            <a:r>
+              <a:rPr lang="en-US" sz="1200" b="1" dirty="0">
+                <a:solidFill>
+                  <a:srgbClr val="FFFFFF"/>
+                </a:solidFill>
+              </a:rPr>
+              <a:t>Validate</a:t>
             </a:r>
             <a:endParaRPr lang="en-US" sz="1200" dirty="0"/>
           </a:p>
@@ -3920,7 +4094,7 @@
                   <a:srgbClr val="FFFFFF"/>
                 </a:solidFill>
               </a:rPr>
-              <a:t>Stage 1 Memo</a:t>
+              <a:t>Stage 1 + 5 Memos</a:t>
             </a:r>
             <a:endParaRPr lang="en-US" sz="1000" dirty="0"/>
           </a:p>
@@ -3959,7 +4133,7 @@
                 <a:ea typeface="Consolas" pitchFamily="34" charset="-122"/>
                 <a:cs typeface="Consolas" pitchFamily="34" charset="-120"/>
               </a:rPr>
-              <a:t>shidler/docs/decisions/</a:t>
+              <a:t>docs/decisions/</a:t>
             </a:r>
             <a:endParaRPr lang="en-US" sz="1050" dirty="0"/>
           </a:p>
@@ -4027,7 +4201,7 @@
                   <a:srgbClr val="FFFFFF"/>
                 </a:solidFill>
               </a:rPr>
-              <a:t>Stage 2 Excel</a:t>
+              <a:t>Stage 2 Spec</a:t>
             </a:r>
             <a:endParaRPr lang="en-US" sz="1000" dirty="0"/>
           </a:p>
@@ -4066,7 +4240,7 @@
                 <a:ea typeface="Consolas" pitchFamily="34" charset="-122"/>
                 <a:cs typeface="Consolas" pitchFamily="34" charset="-120"/>
               </a:rPr>
-              <a:t>shidler/docs/templates/excel/</a:t>
+              <a:t>docs/specs/</a:t>
             </a:r>
             <a:endParaRPr lang="en-US" sz="1050" dirty="0"/>
           </a:p>
@@ -4134,7 +4308,7 @@
                   <a:srgbClr val="FFFFFF"/>
                 </a:solidFill>
               </a:rPr>
-              <a:t>Stage 3 Spec</a:t>
+              <a:t>Stage 3 Workbook</a:t>
             </a:r>
             <a:endParaRPr lang="en-US" sz="1000" dirty="0"/>
           </a:p>
@@ -4173,7 +4347,7 @@
                 <a:ea typeface="Consolas" pitchFamily="34" charset="-122"/>
                 <a:cs typeface="Consolas" pitchFamily="34" charset="-120"/>
               </a:rPr>
-              <a:t>docs/ or project root</a:t>
+              <a:t>models/builds/ + analysis/</a:t>
             </a:r>
             <a:endParaRPr lang="en-US" sz="1050" dirty="0"/>
           </a:p>
@@ -4241,7 +4415,7 @@
                   <a:srgbClr val="FFFFFF"/>
                 </a:solidFill>
               </a:rPr>
-              <a:t>Stage 4 Final</a:t>
+              <a:t>Stage 4 Data + 5 Validation</a:t>
             </a:r>
             <a:endParaRPr lang="en-US" sz="1000" dirty="0"/>
           </a:p>
@@ -4280,7 +4454,7 @@
                 <a:ea typeface="Consolas" pitchFamily="34" charset="-122"/>
                 <a:cs typeface="Consolas" pitchFamily="34" charset="-120"/>
               </a:rPr>
-              <a:t>docs/ or project root</a:t>
+              <a:t>data/  ·  analysis/</a:t>
             </a:r>
             <a:endParaRPr lang="en-US" sz="1050" dirty="0"/>
           </a:p>
@@ -7166,7 +7340,7 @@
                   <a:srgbClr val="5A6B7A"/>
                 </a:solidFill>
               </a:rPr>
-              <a:t>· </a:t>
+              <a:t xml:space="preserve">· </a:t>
             </a:r>
             <a:r>
               <a:rPr lang="en-US" sz="1000" dirty="0">
@@ -7210,7 +7384,7 @@
                   <a:srgbClr val="5A6B7A"/>
                 </a:solidFill>
               </a:rPr>
-              <a:t>· </a:t>
+              <a:t xml:space="preserve">· </a:t>
             </a:r>
             <a:r>
               <a:rPr lang="en-US" sz="1000" dirty="0">
@@ -7254,7 +7428,7 @@
                   <a:srgbClr val="5A6B7A"/>
                 </a:solidFill>
               </a:rPr>
-              <a:t>· </a:t>
+              <a:t xml:space="preserve">· </a:t>
             </a:r>
             <a:r>
               <a:rPr lang="en-US" sz="1000" dirty="0">
@@ -7405,7 +7579,7 @@
                   <a:srgbClr val="B8975C"/>
                 </a:solidFill>
               </a:rPr>
-              <a:t>· </a:t>
+              <a:t xml:space="preserve">· </a:t>
             </a:r>
             <a:r>
               <a:rPr lang="en-US" sz="1000" dirty="0">
@@ -7449,7 +7623,7 @@
                   <a:srgbClr val="B8975C"/>
                 </a:solidFill>
               </a:rPr>
-              <a:t>· </a:t>
+              <a:t xml:space="preserve">· </a:t>
             </a:r>
             <a:r>
               <a:rPr lang="en-US" sz="1000" dirty="0">
@@ -7493,7 +7667,7 @@
                   <a:srgbClr val="B8975C"/>
                 </a:solidFill>
               </a:rPr>
-              <a:t>· </a:t>
+              <a:t xml:space="preserve">· </a:t>
             </a:r>
             <a:r>
               <a:rPr lang="en-US" sz="1000" dirty="0">
@@ -7644,7 +7818,7 @@
                   <a:srgbClr val="6B8FA3"/>
                 </a:solidFill>
               </a:rPr>
-              <a:t>· </a:t>
+              <a:t xml:space="preserve">· </a:t>
             </a:r>
             <a:r>
               <a:rPr lang="en-US" sz="1000" dirty="0">
@@ -7688,7 +7862,7 @@
                   <a:srgbClr val="6B8FA3"/>
                 </a:solidFill>
               </a:rPr>
-              <a:t>· </a:t>
+              <a:t xml:space="preserve">· </a:t>
             </a:r>
             <a:r>
               <a:rPr lang="en-US" sz="1000" dirty="0">
@@ -7732,7 +7906,7 @@
                   <a:srgbClr val="6B8FA3"/>
                 </a:solidFill>
               </a:rPr>
-              <a:t>· </a:t>
+              <a:t xml:space="preserve">· </a:t>
             </a:r>
             <a:r>
               <a:rPr lang="en-US" sz="1000" dirty="0">
@@ -7883,7 +8057,7 @@
                   <a:srgbClr val="B8975C"/>
                 </a:solidFill>
               </a:rPr>
-              <a:t>· </a:t>
+              <a:t xml:space="preserve">· </a:t>
             </a:r>
             <a:r>
               <a:rPr lang="en-US" sz="1000" dirty="0">
@@ -7927,7 +8101,7 @@
                   <a:srgbClr val="B8975C"/>
                 </a:solidFill>
               </a:rPr>
-              <a:t>· </a:t>
+              <a:t xml:space="preserve">· </a:t>
             </a:r>
             <a:r>
               <a:rPr lang="en-US" sz="1000" dirty="0">
@@ -7971,7 +8145,7 @@
                   <a:srgbClr val="B8975C"/>
                 </a:solidFill>
               </a:rPr>
-              <a:t>· </a:t>
+              <a:t xml:space="preserve">· </a:t>
             </a:r>
             <a:r>
               <a:rPr lang="en-US" sz="1000" dirty="0">
@@ -8122,7 +8296,7 @@
                   <a:srgbClr val="6B8FA3"/>
                 </a:solidFill>
               </a:rPr>
-              <a:t>· </a:t>
+              <a:t xml:space="preserve">· </a:t>
             </a:r>
             <a:r>
               <a:rPr lang="en-US" sz="1000" dirty="0">
@@ -8166,7 +8340,7 @@
                   <a:srgbClr val="6B8FA3"/>
                 </a:solidFill>
               </a:rPr>
-              <a:t>· </a:t>
+              <a:t xml:space="preserve">· </a:t>
             </a:r>
             <a:r>
               <a:rPr lang="en-US" sz="1000" dirty="0">
@@ -8210,7 +8384,7 @@
                   <a:srgbClr val="6B8FA3"/>
                 </a:solidFill>
               </a:rPr>
-              <a:t>· </a:t>
+              <a:t xml:space="preserve">· </a:t>
             </a:r>
             <a:r>
               <a:rPr lang="en-US" sz="1000" dirty="0">
@@ -14028,7 +14202,7 @@
                   <a:srgbClr val="36454F"/>
                 </a:solidFill>
               </a:rPr>
-              <a:t>A four-stage deliverable you can show in interviews: memo, model, spec, and AI-powered recommendation.</a:t>
+              <a:t>A six-stage repo you can show in interviews: memo, spec, AI-built model, live data, validated recommendation.</a:t>
             </a:r>
             <a:endParaRPr lang="en-US" sz="1200" dirty="0"/>
           </a:p>
@@ -14971,7 +15145,7 @@
                   <a:srgbClr val="1E2530"/>
                 </a:solidFill>
               </a:rPr>
-              <a:t>Changes tab  </a:t>
+              <a:t xml:space="preserve">Changes tab  </a:t>
             </a:r>
             <a:r>
               <a:rPr lang="en-US" sz="1100" dirty="0">
@@ -15081,7 +15255,7 @@
                   <a:srgbClr val="1E2530"/>
                 </a:solidFill>
               </a:rPr>
-              <a:t>Summary box  </a:t>
+              <a:t xml:space="preserve">Summary box  </a:t>
             </a:r>
             <a:r>
               <a:rPr lang="en-US" sz="1100" dirty="0">
@@ -15191,7 +15365,7 @@
                   <a:srgbClr val="1E2530"/>
                 </a:solidFill>
               </a:rPr>
-              <a:t>Commit button  </a:t>
+              <a:t xml:space="preserve">Commit button  </a:t>
             </a:r>
             <a:r>
               <a:rPr lang="en-US" sz="1100" dirty="0">
@@ -15301,7 +15475,7 @@
                   <a:srgbClr val="1E2530"/>
                 </a:solidFill>
               </a:rPr>
-              <a:t>Push Origin  </a:t>
+              <a:t xml:space="preserve">Push Origin  </a:t>
             </a:r>
             <a:r>
               <a:rPr lang="en-US" sz="1100" dirty="0">
@@ -15513,7 +15687,7 @@
                 <a:ea typeface="Open Sans" pitchFamily="34" charset="-122"/>
                 <a:cs typeface="Open Sans" pitchFamily="34" charset="-120"/>
               </a:rPr>
-              <a:t>Save your files in the right directory, then commit and push. The file naming convention is shown below.</a:t>
+              <a:t>Save each file in the right directory, then commit and push. Plus: prompt-log.md at the repo root, updated every stage.</a:t>
             </a:r>
             <a:endParaRPr lang="en-US" sz="1200" dirty="0"/>
           </a:p>
@@ -15868,7 +16042,7 @@
                           <a:ea typeface="Open Sans" pitchFamily="34" charset="-122"/>
                           <a:cs typeface="Open Sans" pitchFamily="34" charset="-120"/>
                         </a:rPr>
-                        <a:t>1</a:t>
+                        <a:t>0</a:t>
                       </a:r>
                       <a:endParaRPr lang="en-US" sz="1200" dirty="0">
                         <a:latin typeface="Open Sans" charset="0"/>
@@ -15933,7 +16107,7 @@
                           <a:ea typeface="Open Sans" pitchFamily="34" charset="-122"/>
                           <a:cs typeface="Open Sans" pitchFamily="34" charset="-120"/>
                         </a:rPr>
-                        <a:t>Executive Memo</a:t>
+                        <a:t>Repo skeleton</a:t>
                       </a:r>
                       <a:endParaRPr lang="en-US" sz="1200" dirty="0">
                         <a:latin typeface="Open Sans" charset="0"/>
@@ -15998,7 +16172,7 @@
                           <a:ea typeface="Consolas" pitchFamily="34" charset="-122"/>
                           <a:cs typeface="Consolas" pitchFamily="34" charset="-120"/>
                         </a:rPr>
-                        <a:t>lastname-stage1-memo.md</a:t>
+                        <a:t>—</a:t>
                       </a:r>
                       <a:endParaRPr lang="en-US" sz="1100" dirty="0">
                         <a:latin typeface="Consolas" charset="0"/>
@@ -16063,7 +16237,7 @@
                           <a:ea typeface="Consolas" pitchFamily="34" charset="-122"/>
                           <a:cs typeface="Consolas" pitchFamily="34" charset="-120"/>
                         </a:rPr>
-                        <a:t>docs/decisions/</a:t>
+                        <a:t>repo root</a:t>
                       </a:r>
                       <a:endParaRPr lang="en-US" sz="1100" dirty="0">
                         <a:latin typeface="Consolas" charset="0"/>
@@ -16135,7 +16309,7 @@
                           <a:ea typeface="Open Sans" pitchFamily="34" charset="-122"/>
                           <a:cs typeface="Open Sans" pitchFamily="34" charset="-120"/>
                         </a:rPr>
-                        <a:t>2</a:t>
+                        <a:t>1</a:t>
                       </a:r>
                       <a:endParaRPr lang="en-US" sz="1200" dirty="0">
                         <a:latin typeface="Open Sans" charset="0"/>
@@ -16203,7 +16377,7 @@
                           <a:ea typeface="Open Sans" pitchFamily="34" charset="-122"/>
                           <a:cs typeface="Open Sans" pitchFamily="34" charset="-120"/>
                         </a:rPr>
-                        <a:t>Excel Model</a:t>
+                        <a:t>Executive memo</a:t>
                       </a:r>
                       <a:endParaRPr lang="en-US" sz="1200" dirty="0">
                         <a:latin typeface="Open Sans" charset="0"/>
@@ -16271,7 +16445,7 @@
                           <a:ea typeface="Consolas" pitchFamily="34" charset="-122"/>
                           <a:cs typeface="Consolas" pitchFamily="34" charset="-120"/>
                         </a:rPr>
-                        <a:t>lastname-stage2-model.xlsx</a:t>
+                        <a:t>YYYY-MM-DD-lastname-scenario-hedge-framing.md</a:t>
                       </a:r>
                       <a:endParaRPr lang="en-US" sz="1100" dirty="0">
                         <a:latin typeface="Consolas" charset="0"/>
@@ -16339,7 +16513,7 @@
                           <a:ea typeface="Consolas" pitchFamily="34" charset="-122"/>
                           <a:cs typeface="Consolas" pitchFamily="34" charset="-120"/>
                         </a:rPr>
-                        <a:t>docs/templates/excel/</a:t>
+                        <a:t>docs/decisions/</a:t>
                       </a:r>
                       <a:endParaRPr lang="en-US" sz="1100" dirty="0">
                         <a:latin typeface="Consolas" charset="0"/>
@@ -16414,7 +16588,7 @@
                           <a:ea typeface="Open Sans" pitchFamily="34" charset="-122"/>
                           <a:cs typeface="Open Sans" pitchFamily="34" charset="-120"/>
                         </a:rPr>
-                        <a:t>3</a:t>
+                        <a:t>2</a:t>
                       </a:r>
                       <a:endParaRPr lang="en-US" sz="1200" dirty="0">
                         <a:latin typeface="Open Sans" charset="0"/>
@@ -16479,7 +16653,7 @@
                           <a:ea typeface="Open Sans" pitchFamily="34" charset="-122"/>
                           <a:cs typeface="Open Sans" pitchFamily="34" charset="-120"/>
                         </a:rPr>
-                        <a:t>Technical Spec</a:t>
+                        <a:t>Model spec</a:t>
                       </a:r>
                       <a:endParaRPr lang="en-US" sz="1200" dirty="0">
                         <a:latin typeface="Open Sans" charset="0"/>
@@ -16544,7 +16718,7 @@
                           <a:ea typeface="Consolas" pitchFamily="34" charset="-122"/>
                           <a:cs typeface="Consolas" pitchFamily="34" charset="-120"/>
                         </a:rPr>
-                        <a:t>lastname-stage3-spec.md</a:t>
+                        <a:t>YYYY-MM-DD-lastname-scenario-spec.md</a:t>
                       </a:r>
                       <a:endParaRPr lang="en-US" sz="1100" dirty="0">
                         <a:latin typeface="Consolas" charset="0"/>
@@ -16609,7 +16783,7 @@
                           <a:ea typeface="Consolas" pitchFamily="34" charset="-122"/>
                           <a:cs typeface="Consolas" pitchFamily="34" charset="-120"/>
                         </a:rPr>
-                        <a:t>docs/</a:t>
+                        <a:t>docs/specs/</a:t>
                       </a:r>
                       <a:endParaRPr lang="en-US" sz="1100" dirty="0">
                         <a:latin typeface="Consolas" charset="0"/>
@@ -16681,7 +16855,7 @@
                           <a:ea typeface="Open Sans" pitchFamily="34" charset="-122"/>
                           <a:cs typeface="Open Sans" pitchFamily="34" charset="-120"/>
                         </a:rPr>
-                        <a:t>4</a:t>
+                        <a:t>3+4</a:t>
                       </a:r>
                       <a:endParaRPr lang="en-US" sz="1200" dirty="0">
                         <a:latin typeface="Open Sans" charset="0"/>
@@ -16749,7 +16923,7 @@
                           <a:ea typeface="Open Sans" pitchFamily="34" charset="-122"/>
                           <a:cs typeface="Open Sans" pitchFamily="34" charset="-120"/>
                         </a:rPr>
-                        <a:t>Final Analysis</a:t>
+                        <a:t>Workbook · audit · data memo</a:t>
                       </a:r>
                       <a:endParaRPr lang="en-US" sz="1200" dirty="0">
                         <a:latin typeface="Open Sans" charset="0"/>
@@ -16817,7 +16991,7 @@
                           <a:ea typeface="Consolas" pitchFamily="34" charset="-122"/>
                           <a:cs typeface="Consolas" pitchFamily="34" charset="-120"/>
                         </a:rPr>
-                        <a:t>lastname-stage4-final.md</a:t>
+                        <a:t>...-model.xlsx · ...-build-audit.md · ...-market-data.md</a:t>
                       </a:r>
                       <a:endParaRPr lang="en-US" sz="1100" dirty="0">
                         <a:latin typeface="Consolas" charset="0"/>
@@ -16885,7 +17059,7 @@
                           <a:ea typeface="Consolas" pitchFamily="34" charset="-122"/>
                           <a:cs typeface="Consolas" pitchFamily="34" charset="-120"/>
                         </a:rPr>
-                        <a:t>docs/</a:t>
+                        <a:t>models/builds/ · analysis/ · data/</a:t>
                       </a:r>
                       <a:endParaRPr lang="en-US" sz="1100" dirty="0">
                         <a:latin typeface="Consolas" charset="0"/>
@@ -16954,13 +17128,13 @@
                       <a:r>
                         <a:rPr lang="en-US" sz="1200" dirty="0">
                           <a:solidFill>
-                            <a:srgbClr val="8A9BAD"/>
+                            <a:srgbClr val="1E2530"/>
                           </a:solidFill>
                           <a:latin typeface="Open Sans" pitchFamily="34" charset="0"/>
                           <a:ea typeface="Open Sans" pitchFamily="34" charset="-122"/>
                           <a:cs typeface="Open Sans" pitchFamily="34" charset="-120"/>
                         </a:rPr>
-                        <a:t>—</a:t>
+                        <a:t>5</a:t>
                       </a:r>
                       <a:endParaRPr lang="en-US" sz="1200" dirty="0">
                         <a:latin typeface="Open Sans" charset="0"/>
@@ -17025,7 +17199,7 @@
                           <a:ea typeface="Open Sans" pitchFamily="34" charset="-122"/>
                           <a:cs typeface="Open Sans" pitchFamily="34" charset="-120"/>
                         </a:rPr>
-                        <a:t>Prompt Log</a:t>
+                        <a:t>Validation · recommendation</a:t>
                       </a:r>
                       <a:endParaRPr lang="en-US" sz="1200" dirty="0">
                         <a:latin typeface="Open Sans" charset="0"/>
@@ -17090,7 +17264,7 @@
                           <a:ea typeface="Consolas" pitchFamily="34" charset="-122"/>
                           <a:cs typeface="Consolas" pitchFamily="34" charset="-120"/>
                         </a:rPr>
-                        <a:t>prompt-log.md</a:t>
+                        <a:t>...-validation.md · ...-hedge-recommendation.md</a:t>
                       </a:r>
                       <a:endParaRPr lang="en-US" sz="1100" dirty="0">
                         <a:latin typeface="Consolas" charset="0"/>
@@ -17155,7 +17329,7 @@
                           <a:ea typeface="Consolas" pitchFamily="34" charset="-122"/>
                           <a:cs typeface="Consolas" pitchFamily="34" charset="-120"/>
                         </a:rPr>
-                        <a:t>deliverables/</a:t>
+                        <a:t>analysis/ · docs/decisions/</a:t>
                       </a:r>
                       <a:endParaRPr lang="en-US" sz="1100" dirty="0">
                         <a:latin typeface="Consolas" charset="0"/>
@@ -17222,7 +17396,7 @@
         <p:spPr>
           <a:xfrm>
             <a:off x="731520" y="3794760"/>
-            <a:ext cx="7680960" cy="731520"/>
+            <a:ext cx="7680960" cy="868680"/>
           </a:xfrm>
           <a:prstGeom prst="rect">
             <a:avLst/>
@@ -17288,7 +17462,7 @@
         <p:spPr>
           <a:xfrm>
             <a:off x="960120" y="4096512"/>
-            <a:ext cx="7132320" cy="411480"/>
+            <a:ext cx="7132320" cy="548640"/>
           </a:xfrm>
           <a:prstGeom prst="rect">
             <a:avLst/>
@@ -17315,7 +17489,7 @@
                 <a:ea typeface="Consolas" pitchFamily="34" charset="-122"/>
                 <a:cs typeface="Consolas" pitchFamily="34" charset="-120"/>
               </a:rPr>
-              <a:t>git add docs/decisions/stauffer-stage1-memo.md</a:t>
+              <a:t>git add docs/decisions/2026-08-24-stauffer-solar-importer-hedge-framing.md</a:t>
             </a:r>
             <a:endParaRPr lang="en-US" sz="1000" dirty="0"/>
           </a:p>
@@ -17335,7 +17509,7 @@
                 <a:ea typeface="Consolas" pitchFamily="34" charset="-122"/>
                 <a:cs typeface="Consolas" pitchFamily="34" charset="-120"/>
               </a:rPr>
-              <a:t>git commit -m "Stage 1: executive memo for AAPL ratio analysis"</a:t>
+              <a:t>git commit -m "Stage 1: hedge framing memo"</a:t>
             </a:r>
             <a:endParaRPr lang="en-US" sz="1000" dirty="0"/>
           </a:p>
@@ -18436,7 +18610,7 @@
                 <a:ea typeface="Open Sans" pitchFamily="34" charset="-122"/>
                 <a:cs typeface="Open Sans" pitchFamily="34" charset="-120"/>
               </a:rPr>
-              <a:t>for your ratio analysis project.</a:t>
+              <a:t>for your FX hedging project.</a:t>
             </a:r>
             <a:endParaRPr lang="en-US" sz="1400" dirty="0"/>
           </a:p>
@@ -18840,7 +19014,7 @@
                 <a:ea typeface="Open Sans" pitchFamily="34" charset="-122"/>
                 <a:cs typeface="Open Sans" pitchFamily="34" charset="-120"/>
               </a:rPr>
-              <a:t>Explaining ratio formulas and what they mean</a:t>
+              <a:t>Explaining hedge mechanics and what they mean</a:t>
             </a:r>
             <a:endParaRPr lang="en-US" sz="1100" dirty="0"/>
           </a:p>
@@ -19000,7 +19174,7 @@
                 <a:ea typeface="Open Sans" pitchFamily="34" charset="-122"/>
                 <a:cs typeface="Open Sans" pitchFamily="34" charset="-120"/>
               </a:rPr>
-              <a:t>Building structured AI prompts (Stage 4)</a:t>
+              <a:t>Drafting the spec and validation prompts (Stages 2–5)</a:t>
             </a:r>
             <a:endParaRPr lang="en-US" sz="1100" dirty="0"/>
           </a:p>
@@ -19223,7 +19397,7 @@
                 <a:ea typeface="Open Sans" pitchFamily="34" charset="-122"/>
                 <a:cs typeface="Open Sans" pitchFamily="34" charset="-120"/>
               </a:rPr>
-              <a:t>Ratio formulas may be subtly wrong — always verify</a:t>
+              <a:t>Hedge formulas may be subtly wrong — always verify</a:t>
             </a:r>
             <a:endParaRPr lang="en-US" sz="1100" dirty="0"/>
           </a:p>
@@ -19749,7 +19923,7 @@
                 <a:ea typeface="Open Sans" pitchFamily="34" charset="-122"/>
                 <a:cs typeface="Open Sans" pitchFamily="34" charset="-120"/>
               </a:rPr>
-              <a:t>Careful reasoning for multi-step ratio calculations</a:t>
+              <a:t>Careful reasoning for multi-step hedge calculations</a:t>
             </a:r>
             <a:endParaRPr lang="en-US" sz="1100" dirty="0"/>
           </a:p>
@@ -19982,7 +20156,7 @@
                 <a:ea typeface="Open Sans" pitchFamily="34" charset="-122"/>
                 <a:cs typeface="Open Sans" pitchFamily="34" charset="-120"/>
               </a:rPr>
-              <a:t>Upload your .xlsx and ask for ratio verification</a:t>
+              <a:t>Upload your .xlsx and ask for a hedge-math audit</a:t>
             </a:r>
             <a:endParaRPr lang="en-US" sz="1100" dirty="0"/>
           </a:p>
@@ -20022,7 +20196,7 @@
                 <a:ea typeface="Open Sans" pitchFamily="34" charset="-122"/>
                 <a:cs typeface="Open Sans" pitchFamily="34" charset="-120"/>
               </a:rPr>
-              <a:t>Use Claude to draft your Stage 4 AI prompt</a:t>
+              <a:t>Use Claude to draft your Stage 2 spec</a:t>
             </a:r>
             <a:endParaRPr lang="en-US" sz="1100" dirty="0"/>
           </a:p>
@@ -20154,7 +20328,7 @@
                 <a:ea typeface="Open Sans" pitchFamily="34" charset="-122"/>
                 <a:cs typeface="Open Sans" pitchFamily="34" charset="-120"/>
               </a:rPr>
-              <a:t>"I'm writing a 300-400 word executive memo for my CFO about Apple Inc. (AAPL). The memo should cover: why ratio analysis matters, the six ratio categories (Performance, Profitability, Efficiency, Leverage, Liquidity, Du Pont), and a preview of my analytical plan. Use professional finance language."</a:t>
+              <a:t>"I'm writing a 300-400 word executive memo for my CFO about our EUR 8M receivable due in one year. Cover: the FX exposure, what a EURUSD move does to USD proceeds, three hedge families (forward, money market, options) with quick pros/cons, and a preview of my Stages 2–5 plan. Professional finance language."</a:t>
             </a:r>
             <a:endParaRPr lang="en-US" sz="1000" dirty="0"/>
           </a:p>
@@ -20494,7 +20668,7 @@
                   <a:srgbClr val="CC4444"/>
                 </a:solidFill>
               </a:rPr>
-              <a:t>Vague:  </a:t>
+              <a:t xml:space="preserve">Vague:  </a:t>
             </a:r>
             <a:r>
               <a:rPr lang="en-US" sz="1000" i="1" dirty="0">
@@ -20502,7 +20676,7 @@
                   <a:srgbClr val="8A9BAD"/>
                 </a:solidFill>
               </a:rPr>
-              <a:t>"Help me with ratios"</a:t>
+              <a:t>"Help me with hedging"</a:t>
             </a:r>
             <a:endParaRPr lang="en-US" sz="1000" dirty="0"/>
           </a:p>
@@ -20541,7 +20715,7 @@
                   <a:srgbClr val="1B5E40"/>
                 </a:solidFill>
               </a:rPr>
-              <a:t>Better:  </a:t>
+              <a:t xml:space="preserve">Better:  </a:t>
             </a:r>
             <a:r>
               <a:rPr lang="en-US" sz="1000" dirty="0">
@@ -20549,7 +20723,7 @@
                   <a:srgbClr val="5A6B7A"/>
                 </a:solidFill>
               </a:rPr>
-              <a:t>"You are an FP&amp;A analyst at Apple. Calculate the current ratio from these balance sheet figures..."</a:t>
+              <a:t>"You are a treasury analyst at a U.S. exporter. Compute the forward-hedge proceeds for this EUR receivable..."</a:t>
             </a:r>
             <a:endParaRPr lang="en-US" sz="1000" dirty="0"/>
           </a:p>
@@ -20685,7 +20859,7 @@
                   <a:srgbClr val="CC4444"/>
                 </a:solidFill>
               </a:rPr>
-              <a:t>Vague:  </a:t>
+              <a:t xml:space="preserve">Vague:  </a:t>
             </a:r>
             <a:r>
               <a:rPr lang="en-US" sz="1000" i="1" dirty="0">
@@ -20693,7 +20867,7 @@
                   <a:srgbClr val="8A9BAD"/>
                 </a:solidFill>
               </a:rPr>
-              <a:t>"What is AAPL's ROE?"</a:t>
+              <a:t>"What does the forward hedge pay?"</a:t>
             </a:r>
             <a:endParaRPr lang="en-US" sz="1000" dirty="0"/>
           </a:p>
@@ -20732,7 +20906,7 @@
                   <a:srgbClr val="1B5E40"/>
                 </a:solidFill>
               </a:rPr>
-              <a:t>Better:  </a:t>
+              <a:t xml:space="preserve">Better:  </a:t>
             </a:r>
             <a:r>
               <a:rPr lang="en-US" sz="1000" dirty="0">
@@ -20740,7 +20914,7 @@
                   <a:srgbClr val="5A6B7A"/>
                 </a:solidFill>
               </a:rPr>
-              <a:t>"Net Income: $93.7B. Shareholder Equity: $56.9B. Calculate ROE and explain what it means for Apple."</a:t>
+              <a:t>"FC_AMT: EUR 8,000,000. F0_in: 1.0890. Compute the locked-in USD proceeds and explain what locking in means."</a:t>
             </a:r>
             <a:endParaRPr lang="en-US" sz="1000" dirty="0"/>
           </a:p>
@@ -20876,7 +21050,7 @@
                   <a:srgbClr val="CC4444"/>
                 </a:solidFill>
               </a:rPr>
-              <a:t>Vague:  </a:t>
+              <a:t xml:space="preserve">Vague:  </a:t>
             </a:r>
             <a:r>
               <a:rPr lang="en-US" sz="1000" i="1" dirty="0">
@@ -20884,7 +21058,7 @@
                   <a:srgbClr val="8A9BAD"/>
                 </a:solidFill>
               </a:rPr>
-              <a:t>"Analyze these ratios"</a:t>
+              <a:t>"Analyze these hedges"</a:t>
             </a:r>
             <a:endParaRPr lang="en-US" sz="1000" dirty="0"/>
           </a:p>
@@ -20923,7 +21097,7 @@
                   <a:srgbClr val="1B5E40"/>
                 </a:solidFill>
               </a:rPr>
-              <a:t>Better:  </a:t>
+              <a:t xml:space="preserve">Better:  </a:t>
             </a:r>
             <a:r>
               <a:rPr lang="en-US" sz="1000" dirty="0">
@@ -20931,7 +21105,7 @@
                   <a:srgbClr val="5A6B7A"/>
                 </a:solidFill>
               </a:rPr>
-              <a:t>"Present results in a Markdown table with columns: Ratio Name, Formula, Value, Interpretation. Use 2 decimal places."</a:t>
+              <a:t>"Present results in a Markdown table with columns: Strategy, USD Proceeds, Pros, Cons. Use 2 decimal places."</a:t>
             </a:r>
             <a:endParaRPr lang="en-US" sz="1000" dirty="0"/>
           </a:p>
@@ -21067,7 +21241,7 @@
                   <a:srgbClr val="CC4444"/>
                 </a:solidFill>
               </a:rPr>
-              <a:t>Vague:  </a:t>
+              <a:t xml:space="preserve">Vague:  </a:t>
             </a:r>
             <a:r>
               <a:rPr lang="en-US" sz="1000" i="1" dirty="0">
@@ -21114,7 +21288,7 @@
                   <a:srgbClr val="1B5E40"/>
                 </a:solidFill>
               </a:rPr>
-              <a:t>Better:  </a:t>
+              <a:t xml:space="preserve">Better:  </a:t>
             </a:r>
             <a:r>
               <a:rPr lang="en-US" sz="1000" dirty="0">
@@ -21122,7 +21296,7 @@
                   <a:srgbClr val="5A6B7A"/>
                 </a:solidFill>
               </a:rPr>
-              <a:t>"Cross-check: ROE should equal Profit Margin × Asset Turnover × Equity Multiplier via Du Pont. Show the math."</a:t>
+              <a:t>"Cross-check: the money-market hedge should equal the forward within rounding (covered interest parity). Show the math."</a:t>
             </a:r>
             <a:endParaRPr lang="en-US" sz="1000" dirty="0"/>
           </a:p>
@@ -22253,7 +22427,7 @@
         <p:spPr>
           <a:xfrm>
             <a:off x="731520" y="3200400"/>
-            <a:ext cx="7680960" cy="1234440"/>
+            <a:ext cx="7680960" cy="1371600"/>
           </a:xfrm>
           <a:prstGeom prst="rect">
             <a:avLst/>
@@ -22287,7 +22461,7 @@
         <p:spPr>
           <a:xfrm>
             <a:off x="731520" y="3200400"/>
-            <a:ext cx="54864" cy="1234440"/>
+            <a:ext cx="54864" cy="1371600"/>
           </a:xfrm>
           <a:prstGeom prst="rect">
             <a:avLst/>
@@ -22377,7 +22551,7 @@
         <p:spPr>
           <a:xfrm>
             <a:off x="960120" y="3657600"/>
-            <a:ext cx="7269480" cy="640080"/>
+            <a:ext cx="7269480" cy="822960"/>
           </a:xfrm>
           <a:prstGeom prst="rect">
             <a:avLst/>
@@ -22401,7 +22575,7 @@
                   <a:srgbClr val="5A6B7A"/>
                 </a:solidFill>
               </a:rPr>
-              <a:t>Every meaningful AI interaction should be logged in </a:t>
+              <a:t xml:space="preserve">Every meaningful AI interaction should be logged in </a:t>
             </a:r>
             <a:r>
               <a:rPr lang="en-US" sz="1100" b="1" dirty="0">
@@ -22412,7 +22586,7 @@
                 <a:ea typeface="Consolas" pitchFamily="34" charset="-122"/>
                 <a:cs typeface="Consolas" pitchFamily="34" charset="-120"/>
               </a:rPr>
-              <a:t>deliverables/prompt-log.md</a:t>
+              <a:t>prompt-log.md (repo root)</a:t>
             </a:r>
             <a:endParaRPr lang="en-US" sz="1100" dirty="0"/>
           </a:p>
@@ -22438,7 +22612,7 @@
                   <a:srgbClr val="5A6B7A"/>
                 </a:solidFill>
               </a:rPr>
-              <a:t>For each entry, record: </a:t>
+              <a:t xml:space="preserve">For each entry, record: </a:t>
             </a:r>
             <a:endParaRPr lang="en-US" sz="1100" dirty="0"/>
           </a:p>
@@ -22463,7 +22637,7 @@
                   <a:srgbClr val="5A6B7A"/>
                 </a:solidFill>
               </a:rPr>
-              <a:t>, </a:t>
+              <a:t xml:space="preserve">, </a:t>
             </a:r>
             <a:r>
               <a:rPr lang="en-US" sz="1100" b="1" dirty="0">
@@ -22479,7 +22653,7 @@
                   <a:srgbClr val="5A6B7A"/>
                 </a:solidFill>
               </a:rPr>
-              <a:t>, and </a:t>
+              <a:t xml:space="preserve">, and </a:t>
             </a:r>
             <a:r>
               <a:rPr lang="en-US" sz="1100" b="1" dirty="0">
@@ -23871,6 +24045,1169 @@
 </p:sld>
 </file>
 
+<file path=ppt/slides/slide29.xml><?xml version="1.0" encoding="utf-8"?>
+<p:sld xmlns:a="http://schemas.openxmlformats.org/drawingml/2006/main" xmlns:r="http://schemas.openxmlformats.org/officeDocument/2006/relationships" xmlns:p="http://schemas.openxmlformats.org/presentationml/2006/main">
+  <p:cSld name="Slide 4">
+    <p:bg>
+      <p:bgPr>
+        <a:solidFill>
+          <a:srgbClr val="FAF9F7"/>
+        </a:solidFill>
+        <a:effectLst/>
+      </p:bgPr>
+    </p:bg>
+    <p:spTree>
+      <p:nvGrpSpPr>
+        <p:cNvPr id="1" name=""/>
+        <p:cNvGrpSpPr/>
+        <p:nvPr/>
+      </p:nvGrpSpPr>
+      <p:grpSpPr>
+        <a:xfrm>
+          <a:off x="0" y="0"/>
+          <a:ext cx="0" cy="0"/>
+          <a:chOff x="0" y="0"/>
+          <a:chExt cx="0" cy="0"/>
+        </a:xfrm>
+      </p:grpSpPr>
+      <p:sp>
+        <p:nvSpPr>
+          <p:cNvPr id="2" name="Shape 0"/>
+          <p:cNvSpPr/>
+          <p:nvPr/>
+        </p:nvSpPr>
+        <p:spPr>
+          <a:xfrm>
+            <a:off x="0" y="0"/>
+            <a:ext cx="9144000" cy="960120"/>
+          </a:xfrm>
+          <a:prstGeom prst="rect">
+            <a:avLst/>
+          </a:prstGeom>
+          <a:solidFill>
+            <a:srgbClr val="5A6B7A"/>
+          </a:solidFill>
+          <a:ln w="12700">
+            <a:solidFill>
+              <a:srgbClr val="5A6B7A"/>
+            </a:solidFill>
+            <a:prstDash val="solid"/>
+          </a:ln>
+        </p:spPr>
+        <p:txBody>
+          <a:bodyPr/>
+          <a:lstStyle/>
+          <a:p>
+            <a:endParaRPr lang="en-US"/>
+          </a:p>
+        </p:txBody>
+      </p:sp>
+      <p:sp>
+        <p:nvSpPr>
+          <p:cNvPr id="3" name="Shape 1"/>
+          <p:cNvSpPr/>
+          <p:nvPr/>
+        </p:nvSpPr>
+        <p:spPr>
+          <a:xfrm>
+            <a:off x="0" y="960120"/>
+            <a:ext cx="9144000" cy="64008"/>
+          </a:xfrm>
+          <a:prstGeom prst="rect">
+            <a:avLst/>
+          </a:prstGeom>
+          <a:solidFill>
+            <a:srgbClr val="B8975C"/>
+          </a:solidFill>
+          <a:ln w="12700">
+            <a:solidFill>
+              <a:srgbClr val="B8975C"/>
+            </a:solidFill>
+            <a:prstDash val="solid"/>
+          </a:ln>
+        </p:spPr>
+        <p:txBody>
+          <a:bodyPr/>
+          <a:lstStyle/>
+          <a:p>
+            <a:endParaRPr lang="en-US"/>
+          </a:p>
+        </p:txBody>
+      </p:sp>
+      <p:sp>
+        <p:nvSpPr>
+          <p:cNvPr id="4" name="Text 2"/>
+          <p:cNvSpPr/>
+          <p:nvPr/>
+        </p:nvSpPr>
+        <p:spPr>
+          <a:xfrm>
+            <a:off x="411480" y="0"/>
+            <a:ext cx="8321040" cy="960120"/>
+          </a:xfrm>
+          <a:prstGeom prst="rect">
+            <a:avLst/>
+          </a:prstGeom>
+          <a:noFill/>
+          <a:ln/>
+        </p:spPr>
+        <p:txBody>
+          <a:bodyPr wrap="square" rtlCol="0" anchor="ctr"/>
+          <a:lstStyle/>
+          <a:p>
+            <a:pPr marL="0" indent="0">
+              <a:buNone/>
+            </a:pPr>
+            <a:r>
+              <a:rPr lang="en-US" sz="2600" b="1" dirty="0">
+                <a:solidFill>
+                  <a:srgbClr val="FFFFFF"/>
+                </a:solidFill>
+                <a:latin typeface="Georgia" pitchFamily="34" charset="0"/>
+                <a:ea typeface="Georgia" pitchFamily="34" charset="-122"/>
+                <a:cs typeface="Georgia" pitchFamily="34" charset="-120"/>
+              </a:rPr>
+              <a:t>Stage 0 — Portfolio Repository  ·  8% of Project</a:t>
+            </a:r>
+            <a:endParaRPr lang="en-US" sz="2600" dirty="0"/>
+          </a:p>
+        </p:txBody>
+      </p:sp>
+      <p:sp>
+        <p:nvSpPr>
+          <p:cNvPr id="5" name="Shape 3"/>
+          <p:cNvSpPr/>
+          <p:nvPr/>
+        </p:nvSpPr>
+        <p:spPr>
+          <a:xfrm>
+            <a:off x="365760" y="1143000"/>
+            <a:ext cx="8412480" cy="530352"/>
+          </a:xfrm>
+          <a:prstGeom prst="rect">
+            <a:avLst/>
+          </a:prstGeom>
+          <a:solidFill>
+            <a:srgbClr val="FAF9F7"/>
+          </a:solidFill>
+          <a:ln w="12700">
+            <a:solidFill>
+              <a:srgbClr val="5A6B7A"/>
+            </a:solidFill>
+            <a:prstDash val="solid"/>
+          </a:ln>
+        </p:spPr>
+        <p:txBody>
+          <a:bodyPr/>
+          <a:lstStyle/>
+          <a:p>
+            <a:endParaRPr lang="en-US"/>
+          </a:p>
+        </p:txBody>
+      </p:sp>
+      <p:sp>
+        <p:nvSpPr>
+          <p:cNvPr id="6" name="Text 4"/>
+          <p:cNvSpPr/>
+          <p:nvPr/>
+        </p:nvSpPr>
+        <p:spPr>
+          <a:xfrm>
+            <a:off x="502920" y="1143000"/>
+            <a:ext cx="8229600" cy="530352"/>
+          </a:xfrm>
+          <a:prstGeom prst="rect">
+            <a:avLst/>
+          </a:prstGeom>
+          <a:noFill/>
+          <a:ln/>
+        </p:spPr>
+        <p:txBody>
+          <a:bodyPr wrap="square" rtlCol="0" anchor="ctr"/>
+          <a:lstStyle/>
+          <a:p>
+            <a:pPr marL="0" indent="0">
+              <a:buNone/>
+            </a:pPr>
+            <a:r>
+              <a:rPr lang="en-US" sz="1200" dirty="0">
+                <a:solidFill>
+                  <a:srgbClr val="1E2530"/>
+                </a:solidFill>
+              </a:rPr>
+              <a:t>🎯  GOAL  Stand up (or restructure) your public GitHub portfolio repo before analytical work begins — every later deliverable is committed here.</a:t>
+            </a:r>
+            <a:endParaRPr lang="en-US" sz="1200" dirty="0"/>
+          </a:p>
+        </p:txBody>
+      </p:sp>
+      <p:sp>
+        <p:nvSpPr>
+          <p:cNvPr id="7" name="Text 5"/>
+          <p:cNvSpPr/>
+          <p:nvPr/>
+        </p:nvSpPr>
+        <p:spPr>
+          <a:xfrm>
+            <a:off x="365760" y="1810512"/>
+            <a:ext cx="4023360" cy="365760"/>
+          </a:xfrm>
+          <a:prstGeom prst="rect">
+            <a:avLst/>
+          </a:prstGeom>
+          <a:noFill/>
+          <a:ln/>
+        </p:spPr>
+        <p:txBody>
+          <a:bodyPr wrap="square" rtlCol="0" anchor="ctr"/>
+          <a:lstStyle/>
+          <a:p>
+            <a:pPr marL="0" indent="0">
+              <a:buNone/>
+            </a:pPr>
+            <a:r>
+              <a:rPr lang="en-US" sz="1500" b="1" dirty="0">
+                <a:solidFill>
+                  <a:srgbClr val="5A6B7A"/>
+                </a:solidFill>
+              </a:rPr>
+              <a:t>What to Include</a:t>
+            </a:r>
+            <a:endParaRPr lang="en-US" sz="1500" dirty="0"/>
+          </a:p>
+        </p:txBody>
+      </p:sp>
+      <p:sp>
+        <p:nvSpPr>
+          <p:cNvPr id="8" name="Shape 6"/>
+          <p:cNvSpPr/>
+          <p:nvPr/>
+        </p:nvSpPr>
+        <p:spPr>
+          <a:xfrm>
+            <a:off x="365760" y="2258568"/>
+            <a:ext cx="292608" cy="292608"/>
+          </a:xfrm>
+          <a:prstGeom prst="ellipse">
+            <a:avLst/>
+          </a:prstGeom>
+          <a:solidFill>
+            <a:srgbClr val="5A6B7A"/>
+          </a:solidFill>
+          <a:ln w="12700">
+            <a:solidFill>
+              <a:srgbClr val="5A6B7A"/>
+            </a:solidFill>
+            <a:prstDash val="solid"/>
+          </a:ln>
+        </p:spPr>
+        <p:txBody>
+          <a:bodyPr/>
+          <a:lstStyle/>
+          <a:p>
+            <a:endParaRPr lang="en-US"/>
+          </a:p>
+        </p:txBody>
+      </p:sp>
+      <p:sp>
+        <p:nvSpPr>
+          <p:cNvPr id="9" name="Text 7"/>
+          <p:cNvSpPr/>
+          <p:nvPr/>
+        </p:nvSpPr>
+        <p:spPr>
+          <a:xfrm>
+            <a:off x="365760" y="2258568"/>
+            <a:ext cx="292608" cy="292608"/>
+          </a:xfrm>
+          <a:prstGeom prst="rect">
+            <a:avLst/>
+          </a:prstGeom>
+          <a:noFill/>
+          <a:ln/>
+        </p:spPr>
+        <p:txBody>
+          <a:bodyPr wrap="square" lIns="0" tIns="0" rIns="0" bIns="0" rtlCol="0" anchor="ctr"/>
+          <a:lstStyle/>
+          <a:p>
+            <a:pPr marL="0" indent="0" algn="ctr">
+              <a:buNone/>
+            </a:pPr>
+            <a:r>
+              <a:rPr lang="en-US" sz="1100" b="1" dirty="0">
+                <a:solidFill>
+                  <a:srgbClr val="FFFFFF"/>
+                </a:solidFill>
+              </a:rPr>
+              <a:t>1</a:t>
+            </a:r>
+            <a:endParaRPr lang="en-US" sz="1100" dirty="0"/>
+          </a:p>
+        </p:txBody>
+      </p:sp>
+      <p:sp>
+        <p:nvSpPr>
+          <p:cNvPr id="10" name="Text 8"/>
+          <p:cNvSpPr/>
+          <p:nvPr/>
+        </p:nvSpPr>
+        <p:spPr>
+          <a:xfrm>
+            <a:off x="731520" y="2240280"/>
+            <a:ext cx="1188720" cy="329184"/>
+          </a:xfrm>
+          <a:prstGeom prst="rect">
+            <a:avLst/>
+          </a:prstGeom>
+          <a:noFill/>
+          <a:ln/>
+        </p:spPr>
+        <p:txBody>
+          <a:bodyPr wrap="square" lIns="0" tIns="0" rIns="0" bIns="0" rtlCol="0" anchor="ctr"/>
+          <a:lstStyle/>
+          <a:p>
+            <a:pPr marL="0" indent="0">
+              <a:buNone/>
+            </a:pPr>
+            <a:r>
+              <a:rPr lang="en-US" sz="1200" b="1" dirty="0">
+                <a:solidFill>
+                  <a:srgbClr val="1E2530"/>
+                </a:solidFill>
+              </a:rPr>
+              <a:t>Account &amp; Username</a:t>
+            </a:r>
+            <a:endParaRPr lang="en-US" sz="1200" dirty="0"/>
+          </a:p>
+        </p:txBody>
+      </p:sp>
+      <p:sp>
+        <p:nvSpPr>
+          <p:cNvPr id="11" name="Text 9"/>
+          <p:cNvSpPr/>
+          <p:nvPr/>
+        </p:nvSpPr>
+        <p:spPr>
+          <a:xfrm>
+            <a:off x="1965960" y="2240280"/>
+            <a:ext cx="2377440" cy="329184"/>
+          </a:xfrm>
+          <a:prstGeom prst="rect">
+            <a:avLst/>
+          </a:prstGeom>
+          <a:noFill/>
+          <a:ln/>
+        </p:spPr>
+        <p:txBody>
+          <a:bodyPr wrap="square" lIns="0" tIns="0" rIns="0" bIns="0" rtlCol="0" anchor="ctr"/>
+          <a:lstStyle/>
+          <a:p>
+            <a:pPr marL="0" indent="0">
+              <a:buNone/>
+            </a:pPr>
+            <a:r>
+              <a:rPr lang="en-US" sz="1100" dirty="0">
+                <a:solidFill>
+                  <a:srgbClr val="36454F"/>
+                </a:solidFill>
+              </a:rPr>
+              <a:t>Use your .edu email (GitHub Education); professional firstname-lastname repo name</a:t>
+            </a:r>
+            <a:endParaRPr lang="en-US" sz="1100" dirty="0"/>
+          </a:p>
+        </p:txBody>
+      </p:sp>
+      <p:sp>
+        <p:nvSpPr>
+          <p:cNvPr id="12" name="Shape 10"/>
+          <p:cNvSpPr/>
+          <p:nvPr/>
+        </p:nvSpPr>
+        <p:spPr>
+          <a:xfrm>
+            <a:off x="365760" y="2825496"/>
+            <a:ext cx="292608" cy="292608"/>
+          </a:xfrm>
+          <a:prstGeom prst="ellipse">
+            <a:avLst/>
+          </a:prstGeom>
+          <a:solidFill>
+            <a:srgbClr val="5A6B7A"/>
+          </a:solidFill>
+          <a:ln w="12700">
+            <a:solidFill>
+              <a:srgbClr val="5A6B7A"/>
+            </a:solidFill>
+            <a:prstDash val="solid"/>
+          </a:ln>
+        </p:spPr>
+        <p:txBody>
+          <a:bodyPr/>
+          <a:lstStyle/>
+          <a:p>
+            <a:endParaRPr lang="en-US"/>
+          </a:p>
+        </p:txBody>
+      </p:sp>
+      <p:sp>
+        <p:nvSpPr>
+          <p:cNvPr id="13" name="Text 11"/>
+          <p:cNvSpPr/>
+          <p:nvPr/>
+        </p:nvSpPr>
+        <p:spPr>
+          <a:xfrm>
+            <a:off x="365760" y="2825496"/>
+            <a:ext cx="292608" cy="292608"/>
+          </a:xfrm>
+          <a:prstGeom prst="rect">
+            <a:avLst/>
+          </a:prstGeom>
+          <a:noFill/>
+          <a:ln/>
+        </p:spPr>
+        <p:txBody>
+          <a:bodyPr wrap="square" lIns="0" tIns="0" rIns="0" bIns="0" rtlCol="0" anchor="ctr"/>
+          <a:lstStyle/>
+          <a:p>
+            <a:pPr marL="0" indent="0" algn="ctr">
+              <a:buNone/>
+            </a:pPr>
+            <a:r>
+              <a:rPr lang="en-US" sz="1100" b="1" dirty="0">
+                <a:solidFill>
+                  <a:srgbClr val="FFFFFF"/>
+                </a:solidFill>
+              </a:rPr>
+              <a:t>2</a:t>
+            </a:r>
+            <a:endParaRPr lang="en-US" sz="1100" dirty="0"/>
+          </a:p>
+        </p:txBody>
+      </p:sp>
+      <p:sp>
+        <p:nvSpPr>
+          <p:cNvPr id="14" name="Text 12"/>
+          <p:cNvSpPr/>
+          <p:nvPr/>
+        </p:nvSpPr>
+        <p:spPr>
+          <a:xfrm>
+            <a:off x="731520" y="2807208"/>
+            <a:ext cx="1188720" cy="329184"/>
+          </a:xfrm>
+          <a:prstGeom prst="rect">
+            <a:avLst/>
+          </a:prstGeom>
+          <a:noFill/>
+          <a:ln/>
+        </p:spPr>
+        <p:txBody>
+          <a:bodyPr wrap="square" lIns="0" tIns="0" rIns="0" bIns="0" rtlCol="0" anchor="ctr"/>
+          <a:lstStyle/>
+          <a:p>
+            <a:pPr marL="0" indent="0">
+              <a:buNone/>
+            </a:pPr>
+            <a:r>
+              <a:rPr lang="en-US" sz="1200" b="1" dirty="0">
+                <a:solidFill>
+                  <a:srgbClr val="1E2530"/>
+                </a:solidFill>
+              </a:rPr>
+              <a:t>Canonical Skeleton</a:t>
+            </a:r>
+            <a:endParaRPr lang="en-US" sz="1200" dirty="0"/>
+          </a:p>
+        </p:txBody>
+      </p:sp>
+      <p:sp>
+        <p:nvSpPr>
+          <p:cNvPr id="15" name="Text 13"/>
+          <p:cNvSpPr/>
+          <p:nvPr/>
+        </p:nvSpPr>
+        <p:spPr>
+          <a:xfrm>
+            <a:off x="1965960" y="2807208"/>
+            <a:ext cx="2377440" cy="329184"/>
+          </a:xfrm>
+          <a:prstGeom prst="rect">
+            <a:avLst/>
+          </a:prstGeom>
+          <a:noFill/>
+          <a:ln/>
+        </p:spPr>
+        <p:txBody>
+          <a:bodyPr wrap="square" lIns="0" tIns="0" rIns="0" bIns="0" rtlCol="0" anchor="ctr"/>
+          <a:lstStyle/>
+          <a:p>
+            <a:pPr marL="0" indent="0">
+              <a:buNone/>
+            </a:pPr>
+            <a:r>
+              <a:rPr lang="en-US" sz="1100" dirty="0">
+                <a:solidFill>
+                  <a:srgbClr val="36454F"/>
+                </a:solidFill>
+              </a:rPr>
+              <a:t>docs/decisions · docs/specs · models/builds · data · analysis — stub README in every folder</a:t>
+            </a:r>
+            <a:endParaRPr lang="en-US" sz="1100" dirty="0"/>
+          </a:p>
+        </p:txBody>
+      </p:sp>
+      <p:sp>
+        <p:nvSpPr>
+          <p:cNvPr id="16" name="Shape 14"/>
+          <p:cNvSpPr/>
+          <p:nvPr/>
+        </p:nvSpPr>
+        <p:spPr>
+          <a:xfrm>
+            <a:off x="365760" y="3392424"/>
+            <a:ext cx="292608" cy="292608"/>
+          </a:xfrm>
+          <a:prstGeom prst="ellipse">
+            <a:avLst/>
+          </a:prstGeom>
+          <a:solidFill>
+            <a:srgbClr val="5A6B7A"/>
+          </a:solidFill>
+          <a:ln w="12700">
+            <a:solidFill>
+              <a:srgbClr val="5A6B7A"/>
+            </a:solidFill>
+            <a:prstDash val="solid"/>
+          </a:ln>
+        </p:spPr>
+        <p:txBody>
+          <a:bodyPr/>
+          <a:lstStyle/>
+          <a:p>
+            <a:endParaRPr lang="en-US"/>
+          </a:p>
+        </p:txBody>
+      </p:sp>
+      <p:sp>
+        <p:nvSpPr>
+          <p:cNvPr id="17" name="Text 15"/>
+          <p:cNvSpPr/>
+          <p:nvPr/>
+        </p:nvSpPr>
+        <p:spPr>
+          <a:xfrm>
+            <a:off x="365760" y="3392424"/>
+            <a:ext cx="292608" cy="292608"/>
+          </a:xfrm>
+          <a:prstGeom prst="rect">
+            <a:avLst/>
+          </a:prstGeom>
+          <a:noFill/>
+          <a:ln/>
+        </p:spPr>
+        <p:txBody>
+          <a:bodyPr wrap="square" lIns="0" tIns="0" rIns="0" bIns="0" rtlCol="0" anchor="ctr"/>
+          <a:lstStyle/>
+          <a:p>
+            <a:pPr marL="0" indent="0" algn="ctr">
+              <a:buNone/>
+            </a:pPr>
+            <a:r>
+              <a:rPr lang="en-US" sz="1100" b="1" dirty="0">
+                <a:solidFill>
+                  <a:srgbClr val="FFFFFF"/>
+                </a:solidFill>
+              </a:rPr>
+              <a:t>3</a:t>
+            </a:r>
+            <a:endParaRPr lang="en-US" sz="1100" dirty="0"/>
+          </a:p>
+        </p:txBody>
+      </p:sp>
+      <p:sp>
+        <p:nvSpPr>
+          <p:cNvPr id="18" name="Text 16"/>
+          <p:cNvSpPr/>
+          <p:nvPr/>
+        </p:nvSpPr>
+        <p:spPr>
+          <a:xfrm>
+            <a:off x="731520" y="3374136"/>
+            <a:ext cx="1188720" cy="329184"/>
+          </a:xfrm>
+          <a:prstGeom prst="rect">
+            <a:avLst/>
+          </a:prstGeom>
+          <a:noFill/>
+          <a:ln/>
+        </p:spPr>
+        <p:txBody>
+          <a:bodyPr wrap="square" lIns="0" tIns="0" rIns="0" bIns="0" rtlCol="0" anchor="ctr"/>
+          <a:lstStyle/>
+          <a:p>
+            <a:pPr marL="0" indent="0">
+              <a:buNone/>
+            </a:pPr>
+            <a:r>
+              <a:rPr lang="en-US" sz="1200" b="1" dirty="0">
+                <a:solidFill>
+                  <a:srgbClr val="1E2530"/>
+                </a:solidFill>
+              </a:rPr>
+              <a:t>Bio &amp; Resume</a:t>
+            </a:r>
+            <a:endParaRPr lang="en-US" sz="1200" dirty="0"/>
+          </a:p>
+        </p:txBody>
+      </p:sp>
+      <p:sp>
+        <p:nvSpPr>
+          <p:cNvPr id="19" name="Text 17"/>
+          <p:cNvSpPr/>
+          <p:nvPr/>
+        </p:nvSpPr>
+        <p:spPr>
+          <a:xfrm>
+            <a:off x="1965960" y="3374136"/>
+            <a:ext cx="2377440" cy="329184"/>
+          </a:xfrm>
+          <a:prstGeom prst="rect">
+            <a:avLst/>
+          </a:prstGeom>
+          <a:noFill/>
+          <a:ln/>
+        </p:spPr>
+        <p:txBody>
+          <a:bodyPr wrap="square" lIns="0" tIns="0" rIns="0" bIns="0" rtlCol="0" anchor="ctr"/>
+          <a:lstStyle/>
+          <a:p>
+            <a:pPr marL="0" indent="0">
+              <a:buNone/>
+            </a:pPr>
+            <a:r>
+              <a:rPr lang="en-US" sz="1100" dirty="0">
+                <a:solidFill>
+                  <a:srgbClr val="36454F"/>
+                </a:solidFill>
+              </a:rPr>
+              <a:t>README.md bio + RESUME.md — LLM as drafter, you as editor</a:t>
+            </a:r>
+            <a:endParaRPr lang="en-US" sz="1100" dirty="0"/>
+          </a:p>
+        </p:txBody>
+      </p:sp>
+      <p:sp>
+        <p:nvSpPr>
+          <p:cNvPr id="20" name="Shape 18"/>
+          <p:cNvSpPr/>
+          <p:nvPr/>
+        </p:nvSpPr>
+        <p:spPr>
+          <a:xfrm>
+            <a:off x="365760" y="3959352"/>
+            <a:ext cx="292608" cy="292608"/>
+          </a:xfrm>
+          <a:prstGeom prst="ellipse">
+            <a:avLst/>
+          </a:prstGeom>
+          <a:solidFill>
+            <a:srgbClr val="5A6B7A"/>
+          </a:solidFill>
+          <a:ln w="12700">
+            <a:solidFill>
+              <a:srgbClr val="5A6B7A"/>
+            </a:solidFill>
+            <a:prstDash val="solid"/>
+          </a:ln>
+        </p:spPr>
+        <p:txBody>
+          <a:bodyPr/>
+          <a:lstStyle/>
+          <a:p>
+            <a:endParaRPr lang="en-US"/>
+          </a:p>
+        </p:txBody>
+      </p:sp>
+      <p:sp>
+        <p:nvSpPr>
+          <p:cNvPr id="21" name="Text 19"/>
+          <p:cNvSpPr/>
+          <p:nvPr/>
+        </p:nvSpPr>
+        <p:spPr>
+          <a:xfrm>
+            <a:off x="365760" y="3959352"/>
+            <a:ext cx="292608" cy="292608"/>
+          </a:xfrm>
+          <a:prstGeom prst="rect">
+            <a:avLst/>
+          </a:prstGeom>
+          <a:noFill/>
+          <a:ln/>
+        </p:spPr>
+        <p:txBody>
+          <a:bodyPr wrap="square" lIns="0" tIns="0" rIns="0" bIns="0" rtlCol="0" anchor="ctr"/>
+          <a:lstStyle/>
+          <a:p>
+            <a:pPr marL="0" indent="0" algn="ctr">
+              <a:buNone/>
+            </a:pPr>
+            <a:r>
+              <a:rPr lang="en-US" sz="1100" b="1" dirty="0">
+                <a:solidFill>
+                  <a:srgbClr val="FFFFFF"/>
+                </a:solidFill>
+              </a:rPr>
+              <a:t>4</a:t>
+            </a:r>
+            <a:endParaRPr lang="en-US" sz="1100" dirty="0"/>
+          </a:p>
+        </p:txBody>
+      </p:sp>
+      <p:sp>
+        <p:nvSpPr>
+          <p:cNvPr id="22" name="Text 20"/>
+          <p:cNvSpPr/>
+          <p:nvPr/>
+        </p:nvSpPr>
+        <p:spPr>
+          <a:xfrm>
+            <a:off x="731520" y="3941064"/>
+            <a:ext cx="1188720" cy="329184"/>
+          </a:xfrm>
+          <a:prstGeom prst="rect">
+            <a:avLst/>
+          </a:prstGeom>
+          <a:noFill/>
+          <a:ln/>
+        </p:spPr>
+        <p:txBody>
+          <a:bodyPr wrap="square" lIns="0" tIns="0" rIns="0" bIns="0" rtlCol="0" anchor="ctr"/>
+          <a:lstStyle/>
+          <a:p>
+            <a:pPr marL="0" indent="0">
+              <a:buNone/>
+            </a:pPr>
+            <a:r>
+              <a:rPr lang="en-US" sz="1200" b="1" dirty="0">
+                <a:solidFill>
+                  <a:srgbClr val="1E2530"/>
+                </a:solidFill>
+              </a:rPr>
+              <a:t>Prompt Log</a:t>
+            </a:r>
+            <a:endParaRPr lang="en-US" sz="1200" dirty="0"/>
+          </a:p>
+        </p:txBody>
+      </p:sp>
+      <p:sp>
+        <p:nvSpPr>
+          <p:cNvPr id="23" name="Text 21"/>
+          <p:cNvSpPr/>
+          <p:nvPr/>
+        </p:nvSpPr>
+        <p:spPr>
+          <a:xfrm>
+            <a:off x="1965960" y="3941064"/>
+            <a:ext cx="2377440" cy="329184"/>
+          </a:xfrm>
+          <a:prstGeom prst="rect">
+            <a:avLst/>
+          </a:prstGeom>
+          <a:noFill/>
+          <a:ln/>
+        </p:spPr>
+        <p:txBody>
+          <a:bodyPr wrap="square" lIns="0" tIns="0" rIns="0" bIns="0" rtlCol="0" anchor="ctr"/>
+          <a:lstStyle/>
+          <a:p>
+            <a:pPr marL="0" indent="0">
+              <a:buNone/>
+            </a:pPr>
+            <a:r>
+              <a:rPr lang="en-US" sz="1100" dirty="0">
+                <a:solidFill>
+                  <a:srgbClr val="36454F"/>
+                </a:solidFill>
+              </a:rPr>
+              <a:t>prompt-log.md at the repo root, updated at every stage that uses AI</a:t>
+            </a:r>
+            <a:endParaRPr lang="en-US" sz="1100" dirty="0"/>
+          </a:p>
+        </p:txBody>
+      </p:sp>
+      <p:sp>
+        <p:nvSpPr>
+          <p:cNvPr id="24" name="Shape 22"/>
+          <p:cNvSpPr/>
+          <p:nvPr/>
+        </p:nvSpPr>
+        <p:spPr>
+          <a:xfrm>
+            <a:off x="4846320" y="1810512"/>
+            <a:ext cx="3931920" cy="2880360"/>
+          </a:xfrm>
+          <a:prstGeom prst="rect">
+            <a:avLst/>
+          </a:prstGeom>
+          <a:solidFill>
+            <a:srgbClr val="1E2530"/>
+          </a:solidFill>
+          <a:ln w="12700">
+            <a:solidFill>
+              <a:srgbClr val="1E2530"/>
+            </a:solidFill>
+            <a:prstDash val="solid"/>
+          </a:ln>
+          <a:effectLst>
+            <a:outerShdw blurRad="101600" dist="38100" dir="8100000" algn="bl" rotWithShape="0">
+              <a:srgbClr val="000000">
+                <a:alpha val="12000"/>
+              </a:srgbClr>
+            </a:outerShdw>
+          </a:effectLst>
+        </p:spPr>
+        <p:txBody>
+          <a:bodyPr/>
+          <a:lstStyle/>
+          <a:p>
+            <a:endParaRPr lang="en-US"/>
+          </a:p>
+        </p:txBody>
+      </p:sp>
+      <p:sp>
+        <p:nvSpPr>
+          <p:cNvPr id="25" name="Text 23"/>
+          <p:cNvSpPr/>
+          <p:nvPr/>
+        </p:nvSpPr>
+        <p:spPr>
+          <a:xfrm>
+            <a:off x="4846320" y="1810512"/>
+            <a:ext cx="3931920" cy="411480"/>
+          </a:xfrm>
+          <a:prstGeom prst="rect">
+            <a:avLst/>
+          </a:prstGeom>
+          <a:noFill/>
+          <a:ln/>
+        </p:spPr>
+        <p:txBody>
+          <a:bodyPr wrap="square" rtlCol="0" anchor="ctr"/>
+          <a:lstStyle/>
+          <a:p>
+            <a:pPr marL="0" indent="0" algn="ctr">
+              <a:buNone/>
+            </a:pPr>
+            <a:r>
+              <a:rPr lang="en-US" sz="1400" b="1" dirty="0">
+                <a:solidFill>
+                  <a:srgbClr val="B8975C"/>
+                </a:solidFill>
+              </a:rPr>
+              <a:t>Tips for Success</a:t>
+            </a:r>
+            <a:endParaRPr lang="en-US" sz="1400" dirty="0"/>
+          </a:p>
+        </p:txBody>
+      </p:sp>
+      <p:sp>
+        <p:nvSpPr>
+          <p:cNvPr id="26" name="Text 24"/>
+          <p:cNvSpPr/>
+          <p:nvPr/>
+        </p:nvSpPr>
+        <p:spPr>
+          <a:xfrm>
+            <a:off x="4983480" y="2304288"/>
+            <a:ext cx="3657600" cy="402336"/>
+          </a:xfrm>
+          <a:prstGeom prst="rect">
+            <a:avLst/>
+          </a:prstGeom>
+          <a:noFill/>
+          <a:ln/>
+        </p:spPr>
+        <p:txBody>
+          <a:bodyPr wrap="square" rtlCol="0" anchor="ctr"/>
+          <a:lstStyle/>
+          <a:p>
+            <a:pPr marL="0" indent="0">
+              <a:buNone/>
+            </a:pPr>
+            <a:r>
+              <a:rPr lang="en-US" sz="1100" b="1" dirty="0">
+                <a:solidFill>
+                  <a:srgbClr val="B8975C"/>
+                </a:solidFill>
+              </a:rPr>
+              <a:t>▸  </a:t>
+            </a:r>
+            <a:r>
+              <a:rPr lang="en-US" sz="1100" dirty="0">
+                <a:solidFill>
+                  <a:srgbClr val="8A9BAD"/>
+                </a:solidFill>
+              </a:rPr>
+              <a:t>Public is the point — verify in an incognito window</a:t>
+            </a:r>
+            <a:endParaRPr lang="en-US" sz="1100" dirty="0"/>
+          </a:p>
+        </p:txBody>
+      </p:sp>
+      <p:sp>
+        <p:nvSpPr>
+          <p:cNvPr id="27" name="Text 25"/>
+          <p:cNvSpPr/>
+          <p:nvPr/>
+        </p:nvSpPr>
+        <p:spPr>
+          <a:xfrm>
+            <a:off x="4983480" y="2761488"/>
+            <a:ext cx="3657600" cy="402336"/>
+          </a:xfrm>
+          <a:prstGeom prst="rect">
+            <a:avLst/>
+          </a:prstGeom>
+          <a:noFill/>
+          <a:ln/>
+        </p:spPr>
+        <p:txBody>
+          <a:bodyPr wrap="square" rtlCol="0" anchor="ctr"/>
+          <a:lstStyle/>
+          <a:p>
+            <a:pPr marL="0" indent="0">
+              <a:buNone/>
+            </a:pPr>
+            <a:r>
+              <a:rPr lang="en-US" sz="1100" b="1" dirty="0">
+                <a:solidFill>
+                  <a:srgbClr val="B8975C"/>
+                </a:solidFill>
+              </a:rPr>
+              <a:t>▸  </a:t>
+            </a:r>
+            <a:r>
+              <a:rPr lang="en-US" sz="1100" dirty="0">
+                <a:solidFill>
+                  <a:srgbClr val="8A9BAD"/>
+                </a:solidFill>
+              </a:rPr>
+              <a:t>Name the repo for the person, not the course — it outlives every class</a:t>
+            </a:r>
+            <a:endParaRPr lang="en-US" sz="1100" dirty="0"/>
+          </a:p>
+        </p:txBody>
+      </p:sp>
+      <p:sp>
+        <p:nvSpPr>
+          <p:cNvPr id="28" name="Text 26"/>
+          <p:cNvSpPr/>
+          <p:nvPr/>
+        </p:nvSpPr>
+        <p:spPr>
+          <a:xfrm>
+            <a:off x="4983480" y="3218688"/>
+            <a:ext cx="3657600" cy="402336"/>
+          </a:xfrm>
+          <a:prstGeom prst="rect">
+            <a:avLst/>
+          </a:prstGeom>
+          <a:noFill/>
+          <a:ln/>
+        </p:spPr>
+        <p:txBody>
+          <a:bodyPr wrap="square" rtlCol="0" anchor="ctr"/>
+          <a:lstStyle/>
+          <a:p>
+            <a:pPr marL="0" indent="0">
+              <a:buNone/>
+            </a:pPr>
+            <a:r>
+              <a:rPr lang="en-US" sz="1100" b="1" dirty="0">
+                <a:solidFill>
+                  <a:srgbClr val="B8975C"/>
+                </a:solidFill>
+              </a:rPr>
+              <a:t>▸  </a:t>
+            </a:r>
+            <a:r>
+              <a:rPr lang="en-US" sz="1100" dirty="0">
+                <a:solidFill>
+                  <a:srgbClr val="8A9BAD"/>
+                </a:solidFill>
+              </a:rPr>
+              <a:t>Already have a BUS 313/314 repo? Restructure it — don’t start over</a:t>
+            </a:r>
+            <a:endParaRPr lang="en-US" sz="1100" dirty="0"/>
+          </a:p>
+        </p:txBody>
+      </p:sp>
+      <p:sp>
+        <p:nvSpPr>
+          <p:cNvPr id="29" name="Text 27"/>
+          <p:cNvSpPr/>
+          <p:nvPr/>
+        </p:nvSpPr>
+        <p:spPr>
+          <a:xfrm>
+            <a:off x="4983480" y="3675888"/>
+            <a:ext cx="3657600" cy="402336"/>
+          </a:xfrm>
+          <a:prstGeom prst="rect">
+            <a:avLst/>
+          </a:prstGeom>
+          <a:noFill/>
+          <a:ln/>
+        </p:spPr>
+        <p:txBody>
+          <a:bodyPr wrap="square" rtlCol="0" anchor="ctr"/>
+          <a:lstStyle/>
+          <a:p>
+            <a:pPr marL="0" indent="0">
+              <a:buNone/>
+            </a:pPr>
+            <a:r>
+              <a:rPr lang="en-US" sz="1100" b="1" dirty="0">
+                <a:solidFill>
+                  <a:srgbClr val="B8975C"/>
+                </a:solidFill>
+              </a:rPr>
+              <a:t>▸  </a:t>
+            </a:r>
+            <a:r>
+              <a:rPr lang="en-US" sz="1100" dirty="0">
+                <a:solidFill>
+                  <a:srgbClr val="8A9BAD"/>
+                </a:solidFill>
+              </a:rPr>
+              <a:t>≥2 meaningful commits with descriptive messages</a:t>
+            </a:r>
+            <a:endParaRPr lang="en-US" sz="1100" dirty="0"/>
+          </a:p>
+        </p:txBody>
+      </p:sp>
+      <p:sp>
+        <p:nvSpPr>
+          <p:cNvPr id="30" name="Text 28"/>
+          <p:cNvSpPr/>
+          <p:nvPr/>
+        </p:nvSpPr>
+        <p:spPr>
+          <a:xfrm>
+            <a:off x="4983480" y="4133088"/>
+            <a:ext cx="3657600" cy="402336"/>
+          </a:xfrm>
+          <a:prstGeom prst="rect">
+            <a:avLst/>
+          </a:prstGeom>
+          <a:noFill/>
+          <a:ln/>
+        </p:spPr>
+        <p:txBody>
+          <a:bodyPr wrap="square" rtlCol="0" anchor="ctr"/>
+          <a:lstStyle/>
+          <a:p>
+            <a:pPr marL="0" indent="0">
+              <a:buNone/>
+            </a:pPr>
+            <a:r>
+              <a:rPr lang="en-US" sz="1100" b="1" dirty="0">
+                <a:solidFill>
+                  <a:srgbClr val="B8975C"/>
+                </a:solidFill>
+              </a:rPr>
+              <a:t>▸  </a:t>
+            </a:r>
+            <a:r>
+              <a:rPr lang="en-US" sz="1100" dirty="0">
+                <a:solidFill>
+                  <a:srgbClr val="8A9BAD"/>
+                </a:solidFill>
+              </a:rPr>
+              <a:t>Don’t copy course templates in — link to them from a stub README</a:t>
+            </a:r>
+            <a:endParaRPr lang="en-US" sz="1100" dirty="0"/>
+          </a:p>
+        </p:txBody>
+      </p:sp>
+      <p:sp>
+        <p:nvSpPr>
+          <p:cNvPr id="31" name="Shape 29"/>
+          <p:cNvSpPr/>
+          <p:nvPr/>
+        </p:nvSpPr>
+        <p:spPr>
+          <a:xfrm>
+            <a:off x="365760" y="4617720"/>
+            <a:ext cx="4389120" cy="438912"/>
+          </a:xfrm>
+          <a:prstGeom prst="rect">
+            <a:avLst/>
+          </a:prstGeom>
+          <a:solidFill>
+            <a:srgbClr val="F5F5F3"/>
+          </a:solidFill>
+          <a:ln w="12700">
+            <a:solidFill>
+              <a:srgbClr val="5A6B7A"/>
+            </a:solidFill>
+            <a:prstDash val="solid"/>
+          </a:ln>
+        </p:spPr>
+        <p:txBody>
+          <a:bodyPr/>
+          <a:lstStyle/>
+          <a:p>
+            <a:endParaRPr lang="en-US"/>
+          </a:p>
+        </p:txBody>
+      </p:sp>
+      <p:sp>
+        <p:nvSpPr>
+          <p:cNvPr id="32" name="Text 30"/>
+          <p:cNvSpPr/>
+          <p:nvPr/>
+        </p:nvSpPr>
+        <p:spPr>
+          <a:xfrm>
+            <a:off x="365760" y="4617720"/>
+            <a:ext cx="4389120" cy="438912"/>
+          </a:xfrm>
+          <a:prstGeom prst="rect">
+            <a:avLst/>
+          </a:prstGeom>
+          <a:noFill/>
+          <a:ln/>
+        </p:spPr>
+        <p:txBody>
+          <a:bodyPr wrap="square" rtlCol="0" anchor="ctr"/>
+          <a:lstStyle/>
+          <a:p>
+            <a:pPr marL="0" indent="0">
+              <a:buNone/>
+            </a:pPr>
+            <a:r>
+              <a:rPr lang="en-US" sz="1000" i="1" dirty="0">
+                <a:solidFill>
+                  <a:srgbClr val="1E2530"/>
+                </a:solidFill>
+              </a:rPr>
+              <a:t>📄  Deliverable: your repo URL via Lamaku  |  Graded by direct repo inspection  |  Rubric: 4 × 25%</a:t>
+            </a:r>
+            <a:endParaRPr lang="en-US" sz="1000" dirty="0"/>
+          </a:p>
+        </p:txBody>
+      </p:sp>
+    </p:spTree>
+  </p:cSld>
+  <p:clrMapOvr>
+    <a:masterClrMapping/>
+  </p:clrMapOvr>
+</p:sld>
+</file>
+
 <file path=ppt/slides/slide3.xml><?xml version="1.0" encoding="utf-8"?>
 <p:sld xmlns:a="http://schemas.openxmlformats.org/drawingml/2006/main" xmlns:r="http://schemas.openxmlformats.org/officeDocument/2006/relationships" xmlns:p="http://schemas.openxmlformats.org/presentationml/2006/main">
   <p:cSld name="Slide 3">
@@ -23993,7 +25330,7 @@
                 <a:ea typeface="Georgia" pitchFamily="34" charset="-122"/>
                 <a:cs typeface="Georgia" pitchFamily="34" charset="-120"/>
               </a:rPr>
-              <a:t>Project Overview — Four Stages, 24 Points</a:t>
+              <a:t>Project Overview — Six Stages, 100%</a:t>
             </a:r>
             <a:endParaRPr lang="en-US" sz="2600" dirty="0"/>
           </a:p>
@@ -24029,7 +25366,7 @@
                   <a:srgbClr val="B8975C"/>
                 </a:solidFill>
               </a:rPr>
-              <a:t>BUILD  →  DOCUMENT  →  ANALYZE</a:t>
+              <a:t>DESIGN  →  BUILD  →  VALIDATE</a:t>
             </a:r>
             <a:endParaRPr lang="en-US" sz="1300" dirty="0"/>
           </a:p>
@@ -24044,7 +25381,7 @@
         <p:spPr>
           <a:xfrm>
             <a:off x="274320" y="1645920"/>
-            <a:ext cx="1965960" cy="2926080"/>
+            <a:ext cx="1257300" cy="2926080"/>
           </a:xfrm>
           <a:prstGeom prst="rect">
             <a:avLst/>
@@ -24083,7 +25420,7 @@
         <p:spPr>
           <a:xfrm>
             <a:off x="274320" y="1645920"/>
-            <a:ext cx="1965960" cy="548640"/>
+            <a:ext cx="1257300" cy="548640"/>
           </a:xfrm>
           <a:prstGeom prst="rect">
             <a:avLst/>
@@ -24115,7 +25452,7 @@
         <p:spPr>
           <a:xfrm>
             <a:off x="274320" y="1645920"/>
-            <a:ext cx="1965960" cy="274320"/>
+            <a:ext cx="1257300" cy="274320"/>
           </a:xfrm>
           <a:prstGeom prst="rect">
             <a:avLst/>
@@ -24136,7 +25473,7 @@
                   <a:srgbClr val="FFFFFF"/>
                 </a:solidFill>
               </a:rPr>
-              <a:t>Stage 1</a:t>
+              <a:t>Stage 0</a:t>
             </a:r>
             <a:endParaRPr lang="en-US" sz="1000" dirty="0"/>
           </a:p>
@@ -24151,7 +25488,7 @@
         <p:spPr>
           <a:xfrm>
             <a:off x="274320" y="1920240"/>
-            <a:ext cx="1965960" cy="274320"/>
+            <a:ext cx="1257300" cy="274320"/>
           </a:xfrm>
           <a:prstGeom prst="rect">
             <a:avLst/>
@@ -24172,7 +25509,7 @@
                   <a:srgbClr val="FFFFFF"/>
                 </a:solidFill>
               </a:rPr>
-              <a:t>4 pts</a:t>
+              <a:t>8%</a:t>
             </a:r>
             <a:endParaRPr lang="en-US" sz="1200" dirty="0"/>
           </a:p>
@@ -24187,7 +25524,7 @@
         <p:spPr>
           <a:xfrm>
             <a:off x="365760" y="2267712"/>
-            <a:ext cx="1783080" cy="457200"/>
+            <a:ext cx="1074420" cy="457200"/>
           </a:xfrm>
           <a:prstGeom prst="rect">
             <a:avLst/>
@@ -24208,7 +25545,7 @@
                   <a:srgbClr val="1E2530"/>
                 </a:solidFill>
               </a:rPr>
-              <a:t>Executive Memo</a:t>
+              <a:t>Portfolio Repository</a:t>
             </a:r>
             <a:endParaRPr lang="en-US" sz="1200" dirty="0"/>
           </a:p>
@@ -24223,7 +25560,7 @@
         <p:spPr>
           <a:xfrm>
             <a:off x="365760" y="2788920"/>
-            <a:ext cx="1783080" cy="1280160"/>
+            <a:ext cx="1074420" cy="1280160"/>
           </a:xfrm>
           <a:prstGeom prst="rect">
             <a:avLst/>
@@ -24244,7 +25581,7 @@
                   <a:srgbClr val="36454F"/>
                 </a:solidFill>
               </a:rPr>
-              <a:t>Define the FX exposure in business terms. Explain the risk to the CFO and introduce three hedging families with quick pros/cons.</a:t>
+              <a:t>Stand up your public GitHub portfolio repo: canonical skeleton, bio, resume, prompt log.</a:t>
             </a:r>
             <a:endParaRPr lang="en-US" sz="1000" dirty="0"/>
           </a:p>
@@ -24259,7 +25596,7 @@
         <p:spPr>
           <a:xfrm>
             <a:off x="365760" y="4160520"/>
-            <a:ext cx="1783080" cy="347472"/>
+            <a:ext cx="1074420" cy="347472"/>
           </a:xfrm>
           <a:prstGeom prst="rect">
             <a:avLst/>
@@ -24291,7 +25628,7 @@
         <p:spPr>
           <a:xfrm>
             <a:off x="365760" y="4160520"/>
-            <a:ext cx="1783080" cy="347472"/>
+            <a:ext cx="1074420" cy="347472"/>
           </a:xfrm>
           <a:prstGeom prst="rect">
             <a:avLst/>
@@ -24312,7 +25649,7 @@
                   <a:srgbClr val="1E2530"/>
                 </a:solidFill>
               </a:rPr>
-              <a:t>1-page .md memo committed to GitHub</a:t>
+              <a:t>repo URL, graded by inspection</a:t>
             </a:r>
             <a:endParaRPr lang="en-US" sz="850" dirty="0"/>
           </a:p>
@@ -24326,8 +25663,8 @@
         </p:nvSpPr>
         <p:spPr>
           <a:xfrm>
-            <a:off x="2450592" y="1645920"/>
-            <a:ext cx="1965960" cy="2926080"/>
+            <a:off x="1741932" y="1645920"/>
+            <a:ext cx="1257300" cy="2926080"/>
           </a:xfrm>
           <a:prstGeom prst="rect">
             <a:avLst/>
@@ -24365,8 +25702,8 @@
         </p:nvSpPr>
         <p:spPr>
           <a:xfrm>
-            <a:off x="2450592" y="1645920"/>
-            <a:ext cx="1965960" cy="548640"/>
+            <a:off x="1741932" y="1645920"/>
+            <a:ext cx="1257300" cy="548640"/>
           </a:xfrm>
           <a:prstGeom prst="rect">
             <a:avLst/>
@@ -24397,8 +25734,8 @@
         </p:nvSpPr>
         <p:spPr>
           <a:xfrm>
-            <a:off x="2450592" y="1645920"/>
-            <a:ext cx="1965960" cy="274320"/>
+            <a:off x="1741932" y="1645920"/>
+            <a:ext cx="1257300" cy="274320"/>
           </a:xfrm>
           <a:prstGeom prst="rect">
             <a:avLst/>
@@ -24419,7 +25756,7 @@
                   <a:srgbClr val="FFFFFF"/>
                 </a:solidFill>
               </a:rPr>
-              <a:t>Stage 2</a:t>
+              <a:t>Stage 1</a:t>
             </a:r>
             <a:endParaRPr lang="en-US" sz="1000" dirty="0"/>
           </a:p>
@@ -24433,8 +25770,8 @@
         </p:nvSpPr>
         <p:spPr>
           <a:xfrm>
-            <a:off x="2450592" y="1920240"/>
-            <a:ext cx="1965960" cy="274320"/>
+            <a:off x="1741932" y="1920240"/>
+            <a:ext cx="1257300" cy="274320"/>
           </a:xfrm>
           <a:prstGeom prst="rect">
             <a:avLst/>
@@ -24455,7 +25792,7 @@
                   <a:srgbClr val="FFFFFF"/>
                 </a:solidFill>
               </a:rPr>
-              <a:t>6 pts</a:t>
+              <a:t>17%</a:t>
             </a:r>
             <a:endParaRPr lang="en-US" sz="1200" dirty="0"/>
           </a:p>
@@ -24469,8 +25806,8 @@
         </p:nvSpPr>
         <p:spPr>
           <a:xfrm>
-            <a:off x="2542032" y="2267712"/>
-            <a:ext cx="1783080" cy="457200"/>
+            <a:off x="1833372" y="2267712"/>
+            <a:ext cx="1074420" cy="457200"/>
           </a:xfrm>
           <a:prstGeom prst="rect">
             <a:avLst/>
@@ -24491,7 +25828,7 @@
                   <a:srgbClr val="1E2530"/>
                 </a:solidFill>
               </a:rPr>
-              <a:t>Excel Model Build</a:t>
+              <a:t>Executive Memo</a:t>
             </a:r>
             <a:endParaRPr lang="en-US" sz="1200" dirty="0"/>
           </a:p>
@@ -24505,8 +25842,8 @@
         </p:nvSpPr>
         <p:spPr>
           <a:xfrm>
-            <a:off x="2542032" y="2788920"/>
-            <a:ext cx="1783080" cy="1280160"/>
+            <a:off x="1833372" y="2788920"/>
+            <a:ext cx="1074420" cy="1280160"/>
           </a:xfrm>
           <a:prstGeom prst="rect">
             <a:avLst/>
@@ -24527,7 +25864,7 @@
                   <a:srgbClr val="36454F"/>
                 </a:solidFill>
               </a:rPr>
-              <a:t>Build a working spreadsheet computing forward, money market, and option hedge outcomes with a ±5% sensitivity table.</a:t>
+              <a:t>Frame the FX exposure for the CFO and weigh three hedge families with honest pros and cons.</a:t>
             </a:r>
             <a:endParaRPr lang="en-US" sz="1000" dirty="0"/>
           </a:p>
@@ -24541,8 +25878,8 @@
         </p:nvSpPr>
         <p:spPr>
           <a:xfrm>
-            <a:off x="2542032" y="4160520"/>
-            <a:ext cx="1783080" cy="347472"/>
+            <a:off x="1833372" y="4160520"/>
+            <a:ext cx="1074420" cy="347472"/>
           </a:xfrm>
           <a:prstGeom prst="rect">
             <a:avLst/>
@@ -24573,8 +25910,8 @@
         </p:nvSpPr>
         <p:spPr>
           <a:xfrm>
-            <a:off x="2542032" y="4160520"/>
-            <a:ext cx="1783080" cy="347472"/>
+            <a:off x="1833372" y="4160520"/>
+            <a:ext cx="1074420" cy="347472"/>
           </a:xfrm>
           <a:prstGeom prst="rect">
             <a:avLst/>
@@ -24595,7 +25932,7 @@
                   <a:srgbClr val="1E2530"/>
                 </a:solidFill>
               </a:rPr>
-              <a:t>.xlsx workbook with inputs, formulas, outputs</a:t>
+              <a:t>1-page .md memo in docs/decisions/</a:t>
             </a:r>
             <a:endParaRPr lang="en-US" sz="850" dirty="0"/>
           </a:p>
@@ -24609,8 +25946,8 @@
         </p:nvSpPr>
         <p:spPr>
           <a:xfrm>
-            <a:off x="4626864" y="1645920"/>
-            <a:ext cx="1965960" cy="2926080"/>
+            <a:off x="3209544" y="1645920"/>
+            <a:ext cx="1257300" cy="2926080"/>
           </a:xfrm>
           <a:prstGeom prst="rect">
             <a:avLst/>
@@ -24648,8 +25985,8 @@
         </p:nvSpPr>
         <p:spPr>
           <a:xfrm>
-            <a:off x="4626864" y="1645920"/>
-            <a:ext cx="1965960" cy="548640"/>
+            <a:off x="3209544" y="1645920"/>
+            <a:ext cx="1257300" cy="548640"/>
           </a:xfrm>
           <a:prstGeom prst="rect">
             <a:avLst/>
@@ -24680,8 +26017,8 @@
         </p:nvSpPr>
         <p:spPr>
           <a:xfrm>
-            <a:off x="4626864" y="1645920"/>
-            <a:ext cx="1965960" cy="274320"/>
+            <a:off x="3209544" y="1645920"/>
+            <a:ext cx="1257300" cy="274320"/>
           </a:xfrm>
           <a:prstGeom prst="rect">
             <a:avLst/>
@@ -24702,7 +26039,7 @@
                   <a:srgbClr val="FFFFFF"/>
                 </a:solidFill>
               </a:rPr>
-              <a:t>Stage 3</a:t>
+              <a:t>Stage 2</a:t>
             </a:r>
             <a:endParaRPr lang="en-US" sz="1000" dirty="0"/>
           </a:p>
@@ -24716,8 +26053,8 @@
         </p:nvSpPr>
         <p:spPr>
           <a:xfrm>
-            <a:off x="4626864" y="1920240"/>
-            <a:ext cx="1965960" cy="274320"/>
+            <a:off x="3209544" y="1920240"/>
+            <a:ext cx="1257300" cy="274320"/>
           </a:xfrm>
           <a:prstGeom prst="rect">
             <a:avLst/>
@@ -24738,7 +26075,7 @@
                   <a:srgbClr val="FFFFFF"/>
                 </a:solidFill>
               </a:rPr>
-              <a:t>4 pts</a:t>
+              <a:t>21%</a:t>
             </a:r>
             <a:endParaRPr lang="en-US" sz="1200" dirty="0"/>
           </a:p>
@@ -24752,8 +26089,8 @@
         </p:nvSpPr>
         <p:spPr>
           <a:xfrm>
-            <a:off x="4718304" y="2267712"/>
-            <a:ext cx="1783080" cy="457200"/>
+            <a:off x="3300984" y="2267712"/>
+            <a:ext cx="1074420" cy="457200"/>
           </a:xfrm>
           <a:prstGeom prst="rect">
             <a:avLst/>
@@ -24774,7 +26111,7 @@
                   <a:srgbClr val="1E2530"/>
                 </a:solidFill>
               </a:rPr>
-              <a:t>Technical Spec</a:t>
+              <a:t>Model Specification</a:t>
             </a:r>
             <a:endParaRPr lang="en-US" sz="1200" dirty="0"/>
           </a:p>
@@ -24788,8 +26125,8 @@
         </p:nvSpPr>
         <p:spPr>
           <a:xfrm>
-            <a:off x="4718304" y="2788920"/>
-            <a:ext cx="1783080" cy="1280160"/>
+            <a:off x="3300984" y="2788920"/>
+            <a:ext cx="1074420" cy="1280160"/>
           </a:xfrm>
           <a:prstGeom prst="rect">
             <a:avLst/>
@@ -24810,7 +26147,7 @@
                   <a:srgbClr val="36454F"/>
                 </a:solidFill>
               </a:rPr>
-              <a:t>Document what you built and articulate an improved design — precise enough for another analyst or an AI to reconstruct.</a:t>
+              <a:t>Design the workbook before Excel exists — named ranges, tabs, formulas, checks. The spec is the prompt.</a:t>
             </a:r>
             <a:endParaRPr lang="en-US" sz="1000" dirty="0"/>
           </a:p>
@@ -24824,8 +26161,8 @@
         </p:nvSpPr>
         <p:spPr>
           <a:xfrm>
-            <a:off x="4718304" y="4160520"/>
-            <a:ext cx="1783080" cy="347472"/>
+            <a:off x="3300984" y="4160520"/>
+            <a:ext cx="1074420" cy="347472"/>
           </a:xfrm>
           <a:prstGeom prst="rect">
             <a:avLst/>
@@ -24856,8 +26193,8 @@
         </p:nvSpPr>
         <p:spPr>
           <a:xfrm>
-            <a:off x="4718304" y="4160520"/>
-            <a:ext cx="1783080" cy="347472"/>
+            <a:off x="3300984" y="4160520"/>
+            <a:ext cx="1074420" cy="347472"/>
           </a:xfrm>
           <a:prstGeom prst="rect">
             <a:avLst/>
@@ -24892,8 +26229,8 @@
         </p:nvSpPr>
         <p:spPr>
           <a:xfrm>
-            <a:off x="6803136" y="1645920"/>
-            <a:ext cx="1965960" cy="2926080"/>
+            <a:off x="4677156" y="1645920"/>
+            <a:ext cx="1257300" cy="2926080"/>
           </a:xfrm>
           <a:prstGeom prst="rect">
             <a:avLst/>
@@ -24931,8 +26268,8 @@
         </p:nvSpPr>
         <p:spPr>
           <a:xfrm>
-            <a:off x="6803136" y="1645920"/>
-            <a:ext cx="1965960" cy="548640"/>
+            <a:off x="4677156" y="1645920"/>
+            <a:ext cx="1257300" cy="548640"/>
           </a:xfrm>
           <a:prstGeom prst="rect">
             <a:avLst/>
@@ -24963,8 +26300,8 @@
         </p:nvSpPr>
         <p:spPr>
           <a:xfrm>
-            <a:off x="6803136" y="1645920"/>
-            <a:ext cx="1965960" cy="274320"/>
+            <a:off x="4677156" y="1645920"/>
+            <a:ext cx="1257300" cy="274320"/>
           </a:xfrm>
           <a:prstGeom prst="rect">
             <a:avLst/>
@@ -24985,7 +26322,7 @@
                   <a:srgbClr val="FFFFFF"/>
                 </a:solidFill>
               </a:rPr>
-              <a:t>Stage 4</a:t>
+              <a:t>Stage 3</a:t>
             </a:r>
             <a:endParaRPr lang="en-US" sz="1000" dirty="0"/>
           </a:p>
@@ -24999,8 +26336,8 @@
         </p:nvSpPr>
         <p:spPr>
           <a:xfrm>
-            <a:off x="6803136" y="1920240"/>
-            <a:ext cx="1965960" cy="274320"/>
+            <a:off x="4677156" y="1920240"/>
+            <a:ext cx="1257300" cy="274320"/>
           </a:xfrm>
           <a:prstGeom prst="rect">
             <a:avLst/>
@@ -25021,7 +26358,7 @@
                   <a:srgbClr val="FFFFFF"/>
                 </a:solidFill>
               </a:rPr>
-              <a:t>10 pts</a:t>
+              <a:t>17%</a:t>
             </a:r>
             <a:endParaRPr lang="en-US" sz="1200" dirty="0"/>
           </a:p>
@@ -25035,8 +26372,8 @@
         </p:nvSpPr>
         <p:spPr>
           <a:xfrm>
-            <a:off x="6894576" y="2267712"/>
-            <a:ext cx="1783080" cy="457200"/>
+            <a:off x="4768596" y="2267712"/>
+            <a:ext cx="1074420" cy="457200"/>
           </a:xfrm>
           <a:prstGeom prst="rect">
             <a:avLst/>
@@ -25057,7 +26394,7 @@
                   <a:srgbClr val="1E2530"/>
                 </a:solidFill>
               </a:rPr>
-              <a:t>Final Analysis + AI Prompt</a:t>
+              <a:t>AI Build + Audit</a:t>
             </a:r>
             <a:endParaRPr lang="en-US" sz="1200" dirty="0"/>
           </a:p>
@@ -25071,8 +26408,8 @@
         </p:nvSpPr>
         <p:spPr>
           <a:xfrm>
-            <a:off x="6894576" y="2788920"/>
-            <a:ext cx="1783080" cy="1280160"/>
+            <a:off x="4768596" y="2788920"/>
+            <a:ext cx="1074420" cy="1280160"/>
           </a:xfrm>
           <a:prstGeom prst="rect">
             <a:avLst/>
@@ -25093,7 +26430,7 @@
                   <a:srgbClr val="36454F"/>
                 </a:solidFill>
               </a:rPr>
-              <a:t>Interpret results, write a structured AI prompt to regenerate your model, and deliver an executive-ready recommendation.</a:t>
+              <a:t>An AI builds the workbook from your spec; you audit it against the build contract.</a:t>
             </a:r>
             <a:endParaRPr lang="en-US" sz="1000" dirty="0"/>
           </a:p>
@@ -25107,8 +26444,8 @@
         </p:nvSpPr>
         <p:spPr>
           <a:xfrm>
-            <a:off x="6894576" y="4160520"/>
-            <a:ext cx="1783080" cy="347472"/>
+            <a:off x="4768596" y="4160520"/>
+            <a:ext cx="1074420" cy="347472"/>
           </a:xfrm>
           <a:prstGeom prst="rect">
             <a:avLst/>
@@ -25139,8 +26476,8 @@
         </p:nvSpPr>
         <p:spPr>
           <a:xfrm>
-            <a:off x="6894576" y="4160520"/>
-            <a:ext cx="1783080" cy="347472"/>
+            <a:off x="4768596" y="4160520"/>
+            <a:ext cx="1074420" cy="347472"/>
           </a:xfrm>
           <a:prstGeom prst="rect">
             <a:avLst/>
@@ -25161,7 +26498,7 @@
                   <a:srgbClr val="1E2530"/>
                 </a:solidFill>
               </a:rPr>
-              <a:t>2–4 page .md final deliverable</a:t>
+              <a:t>.xlsx build + ≥3-finding audit note</a:t>
             </a:r>
             <a:endParaRPr lang="en-US" sz="850" dirty="0"/>
           </a:p>
@@ -25175,7 +26512,7 @@
         </p:nvSpPr>
         <p:spPr>
           <a:xfrm>
-            <a:off x="2240280" y="2971800"/>
+            <a:off x="1531620" y="2971800"/>
             <a:ext cx="210312" cy="0"/>
           </a:xfrm>
           <a:prstGeom prst="line">
@@ -25205,7 +26542,7 @@
         </p:nvSpPr>
         <p:spPr>
           <a:xfrm>
-            <a:off x="4416552" y="2971800"/>
+            <a:off x="2999232" y="2971800"/>
             <a:ext cx="210312" cy="0"/>
           </a:xfrm>
           <a:prstGeom prst="line">
@@ -25235,7 +26572,7 @@
         </p:nvSpPr>
         <p:spPr>
           <a:xfrm>
-            <a:off x="6592824" y="2971800"/>
+            <a:off x="4466844" y="2971800"/>
             <a:ext cx="210312" cy="0"/>
           </a:xfrm>
           <a:prstGeom prst="line">
@@ -25254,6 +26591,2047 @@
           <a:lstStyle/>
           <a:p>
             <a:endParaRPr lang="en-US"/>
+          </a:p>
+        </p:txBody>
+      </p:sp>
+      <p:sp>
+        <p:nvSpPr>
+          <p:cNvPr id="41" name="Shape 41"/>
+          <p:cNvSpPr/>
+          <p:nvPr/>
+        </p:nvSpPr>
+        <p:spPr>
+          <a:xfrm>
+            <a:off x="6144768" y="1645920"/>
+            <a:ext cx="1257300" cy="2926080"/>
+          </a:xfrm>
+          <a:prstGeom prst="rect">
+            <a:avLst/>
+          </a:prstGeom>
+          <a:solidFill>
+            <a:srgbClr val="FFFFFF"/>
+          </a:solidFill>
+          <a:ln w="12700">
+            <a:solidFill>
+              <a:srgbClr val="FAF9F7"/>
+            </a:solidFill>
+            <a:prstDash val="solid"/>
+          </a:ln>
+          <a:effectLst>
+            <a:outerShdw blurRad="101600" dist="38100" dir="8100000" algn="bl" rotWithShape="0">
+              <a:srgbClr val="000000">
+                <a:alpha val="12000"/>
+              </a:srgbClr>
+            </a:outerShdw>
+          </a:effectLst>
+        </p:spPr>
+        <p:txBody>
+          <a:bodyPr/>
+          <a:lstStyle/>
+          <a:p>
+            <a:endParaRPr lang="en-US"/>
+          </a:p>
+        </p:txBody>
+      </p:sp>
+      <p:sp>
+        <p:nvSpPr>
+          <p:cNvPr id="42" name="Shape 42"/>
+          <p:cNvSpPr/>
+          <p:nvPr/>
+        </p:nvSpPr>
+        <p:spPr>
+          <a:xfrm>
+            <a:off x="6144768" y="1645920"/>
+            <a:ext cx="1257300" cy="548640"/>
+          </a:xfrm>
+          <a:prstGeom prst="rect">
+            <a:avLst/>
+          </a:prstGeom>
+          <a:solidFill>
+            <a:srgbClr val="5A6B7A"/>
+          </a:solidFill>
+          <a:ln w="12700">
+            <a:solidFill>
+              <a:srgbClr val="5A6B7A"/>
+            </a:solidFill>
+            <a:prstDash val="solid"/>
+          </a:ln>
+        </p:spPr>
+        <p:txBody>
+          <a:bodyPr/>
+          <a:lstStyle/>
+          <a:p>
+            <a:endParaRPr lang="en-US"/>
+          </a:p>
+        </p:txBody>
+      </p:sp>
+      <p:sp>
+        <p:nvSpPr>
+          <p:cNvPr id="43" name="Text 43"/>
+          <p:cNvSpPr/>
+          <p:nvPr/>
+        </p:nvSpPr>
+        <p:spPr>
+          <a:xfrm>
+            <a:off x="6144768" y="1645920"/>
+            <a:ext cx="1257300" cy="274320"/>
+          </a:xfrm>
+          <a:prstGeom prst="rect">
+            <a:avLst/>
+          </a:prstGeom>
+          <a:noFill/>
+          <a:ln/>
+        </p:spPr>
+        <p:txBody>
+          <a:bodyPr wrap="square" lIns="0" tIns="0" rIns="0" bIns="0" rtlCol="0" anchor="ctr"/>
+          <a:lstStyle/>
+          <a:p>
+            <a:pPr marL="0" indent="0" algn="ctr">
+              <a:buNone/>
+            </a:pPr>
+            <a:r>
+              <a:rPr lang="en-US" sz="1000" b="1" dirty="0">
+                <a:solidFill>
+                  <a:srgbClr val="FFFFFF"/>
+                </a:solidFill>
+              </a:rPr>
+              <a:t>Stage 4</a:t>
+            </a:r>
+            <a:endParaRPr lang="en-US" sz="1000" dirty="0"/>
+          </a:p>
+        </p:txBody>
+      </p:sp>
+      <p:sp>
+        <p:nvSpPr>
+          <p:cNvPr id="44" name="Text 44"/>
+          <p:cNvSpPr/>
+          <p:nvPr/>
+        </p:nvSpPr>
+        <p:spPr>
+          <a:xfrm>
+            <a:off x="6144768" y="1920240"/>
+            <a:ext cx="1257300" cy="274320"/>
+          </a:xfrm>
+          <a:prstGeom prst="rect">
+            <a:avLst/>
+          </a:prstGeom>
+          <a:noFill/>
+          <a:ln/>
+        </p:spPr>
+        <p:txBody>
+          <a:bodyPr wrap="square" lIns="0" tIns="0" rIns="0" bIns="0" rtlCol="0" anchor="ctr"/>
+          <a:lstStyle/>
+          <a:p>
+            <a:pPr marL="0" indent="0" algn="ctr">
+              <a:buNone/>
+            </a:pPr>
+            <a:r>
+              <a:rPr lang="en-US" sz="1200" b="1" dirty="0">
+                <a:solidFill>
+                  <a:srgbClr val="FFFFFF"/>
+                </a:solidFill>
+              </a:rPr>
+              <a:t>12%</a:t>
+            </a:r>
+            <a:endParaRPr lang="en-US" sz="1200" dirty="0"/>
+          </a:p>
+        </p:txBody>
+      </p:sp>
+      <p:sp>
+        <p:nvSpPr>
+          <p:cNvPr id="45" name="Text 45"/>
+          <p:cNvSpPr/>
+          <p:nvPr/>
+        </p:nvSpPr>
+        <p:spPr>
+          <a:xfrm>
+            <a:off x="6236208" y="2267712"/>
+            <a:ext cx="1074420" cy="457200"/>
+          </a:xfrm>
+          <a:prstGeom prst="rect">
+            <a:avLst/>
+          </a:prstGeom>
+          <a:noFill/>
+          <a:ln/>
+        </p:spPr>
+        <p:txBody>
+          <a:bodyPr wrap="square" rtlCol="0" anchor="ctr"/>
+          <a:lstStyle/>
+          <a:p>
+            <a:pPr marL="0" indent="0" algn="ctr">
+              <a:buNone/>
+            </a:pPr>
+            <a:r>
+              <a:rPr lang="en-US" sz="1200" b="1" dirty="0">
+                <a:solidFill>
+                  <a:srgbClr val="1E2530"/>
+                </a:solidFill>
+              </a:rPr>
+              <a:t>Market Data</a:t>
+            </a:r>
+            <a:endParaRPr lang="en-US" sz="1200" dirty="0"/>
+          </a:p>
+        </p:txBody>
+      </p:sp>
+      <p:sp>
+        <p:nvSpPr>
+          <p:cNvPr id="46" name="Text 46"/>
+          <p:cNvSpPr/>
+          <p:nvPr/>
+        </p:nvSpPr>
+        <p:spPr>
+          <a:xfrm>
+            <a:off x="6236208" y="2788920"/>
+            <a:ext cx="1074420" cy="1280160"/>
+          </a:xfrm>
+          <a:prstGeom prst="rect">
+            <a:avLst/>
+          </a:prstGeom>
+          <a:noFill/>
+          <a:ln/>
+        </p:spPr>
+        <p:txBody>
+          <a:bodyPr wrap="square" rtlCol="0" anchor="ctr"/>
+          <a:lstStyle/>
+          <a:p>
+            <a:pPr marL="0" indent="0">
+              <a:buNone/>
+            </a:pPr>
+            <a:r>
+              <a:rPr lang="en-US" sz="1000" dirty="0">
+                <a:solidFill>
+                  <a:srgbClr val="36454F"/>
+                </a:solidFill>
+              </a:rPr>
+              <a:t>Replace placeholders with live, sourced data. The model must survive it; cross-check vs the FX Lab.</a:t>
+            </a:r>
+            <a:endParaRPr lang="en-US" sz="1000" dirty="0"/>
+          </a:p>
+        </p:txBody>
+      </p:sp>
+      <p:sp>
+        <p:nvSpPr>
+          <p:cNvPr id="47" name="Shape 47"/>
+          <p:cNvSpPr/>
+          <p:nvPr/>
+        </p:nvSpPr>
+        <p:spPr>
+          <a:xfrm>
+            <a:off x="6236208" y="4160520"/>
+            <a:ext cx="1074420" cy="347472"/>
+          </a:xfrm>
+          <a:prstGeom prst="rect">
+            <a:avLst/>
+          </a:prstGeom>
+          <a:solidFill>
+            <a:srgbClr val="F5F5F3"/>
+          </a:solidFill>
+          <a:ln w="12700">
+            <a:solidFill>
+              <a:srgbClr val="8A9BAD"/>
+            </a:solidFill>
+            <a:prstDash val="solid"/>
+          </a:ln>
+        </p:spPr>
+        <p:txBody>
+          <a:bodyPr/>
+          <a:lstStyle/>
+          <a:p>
+            <a:endParaRPr lang="en-US"/>
+          </a:p>
+        </p:txBody>
+      </p:sp>
+      <p:sp>
+        <p:nvSpPr>
+          <p:cNvPr id="48" name="Text 48"/>
+          <p:cNvSpPr/>
+          <p:nvPr/>
+        </p:nvSpPr>
+        <p:spPr>
+          <a:xfrm>
+            <a:off x="6236208" y="4160520"/>
+            <a:ext cx="1074420" cy="347472"/>
+          </a:xfrm>
+          <a:prstGeom prst="rect">
+            <a:avLst/>
+          </a:prstGeom>
+          <a:noFill/>
+          <a:ln/>
+        </p:spPr>
+        <p:txBody>
+          <a:bodyPr wrap="square" rtlCol="0" anchor="ctr"/>
+          <a:lstStyle/>
+          <a:p>
+            <a:pPr marL="0" indent="0" algn="ctr">
+              <a:buNone/>
+            </a:pPr>
+            <a:r>
+              <a:rPr lang="en-US" sz="850" i="1" dirty="0">
+                <a:solidFill>
+                  <a:srgbClr val="1E2530"/>
+                </a:solidFill>
+              </a:rPr>
+              <a:t>data memo + updated model</a:t>
+            </a:r>
+            <a:endParaRPr lang="en-US" sz="850" dirty="0"/>
+          </a:p>
+        </p:txBody>
+      </p:sp>
+      <p:sp>
+        <p:nvSpPr>
+          <p:cNvPr id="49" name="Shape 49"/>
+          <p:cNvSpPr/>
+          <p:nvPr/>
+        </p:nvSpPr>
+        <p:spPr>
+          <a:xfrm>
+            <a:off x="7612380" y="1645920"/>
+            <a:ext cx="1257300" cy="2926080"/>
+          </a:xfrm>
+          <a:prstGeom prst="rect">
+            <a:avLst/>
+          </a:prstGeom>
+          <a:solidFill>
+            <a:srgbClr val="FFFFFF"/>
+          </a:solidFill>
+          <a:ln w="12700">
+            <a:solidFill>
+              <a:srgbClr val="FAF9F7"/>
+            </a:solidFill>
+            <a:prstDash val="solid"/>
+          </a:ln>
+          <a:effectLst>
+            <a:outerShdw blurRad="101600" dist="38100" dir="8100000" algn="bl" rotWithShape="0">
+              <a:srgbClr val="000000">
+                <a:alpha val="12000"/>
+              </a:srgbClr>
+            </a:outerShdw>
+          </a:effectLst>
+        </p:spPr>
+        <p:txBody>
+          <a:bodyPr/>
+          <a:lstStyle/>
+          <a:p>
+            <a:endParaRPr lang="en-US"/>
+          </a:p>
+        </p:txBody>
+      </p:sp>
+      <p:sp>
+        <p:nvSpPr>
+          <p:cNvPr id="50" name="Shape 50"/>
+          <p:cNvSpPr/>
+          <p:nvPr/>
+        </p:nvSpPr>
+        <p:spPr>
+          <a:xfrm>
+            <a:off x="7612380" y="1645920"/>
+            <a:ext cx="1257300" cy="548640"/>
+          </a:xfrm>
+          <a:prstGeom prst="rect">
+            <a:avLst/>
+          </a:prstGeom>
+          <a:solidFill>
+            <a:srgbClr val="B8975C"/>
+          </a:solidFill>
+          <a:ln w="12700">
+            <a:solidFill>
+              <a:srgbClr val="B8975C"/>
+            </a:solidFill>
+            <a:prstDash val="solid"/>
+          </a:ln>
+        </p:spPr>
+        <p:txBody>
+          <a:bodyPr/>
+          <a:lstStyle/>
+          <a:p>
+            <a:endParaRPr lang="en-US"/>
+          </a:p>
+        </p:txBody>
+      </p:sp>
+      <p:sp>
+        <p:nvSpPr>
+          <p:cNvPr id="51" name="Text 51"/>
+          <p:cNvSpPr/>
+          <p:nvPr/>
+        </p:nvSpPr>
+        <p:spPr>
+          <a:xfrm>
+            <a:off x="7612380" y="1645920"/>
+            <a:ext cx="1257300" cy="274320"/>
+          </a:xfrm>
+          <a:prstGeom prst="rect">
+            <a:avLst/>
+          </a:prstGeom>
+          <a:noFill/>
+          <a:ln/>
+        </p:spPr>
+        <p:txBody>
+          <a:bodyPr wrap="square" lIns="0" tIns="0" rIns="0" bIns="0" rtlCol="0" anchor="ctr"/>
+          <a:lstStyle/>
+          <a:p>
+            <a:pPr marL="0" indent="0" algn="ctr">
+              <a:buNone/>
+            </a:pPr>
+            <a:r>
+              <a:rPr lang="en-US" sz="1000" b="1" dirty="0">
+                <a:solidFill>
+                  <a:srgbClr val="FFFFFF"/>
+                </a:solidFill>
+              </a:rPr>
+              <a:t>Stage 5</a:t>
+            </a:r>
+            <a:endParaRPr lang="en-US" sz="1000" dirty="0"/>
+          </a:p>
+        </p:txBody>
+      </p:sp>
+      <p:sp>
+        <p:nvSpPr>
+          <p:cNvPr id="52" name="Text 52"/>
+          <p:cNvSpPr/>
+          <p:nvPr/>
+        </p:nvSpPr>
+        <p:spPr>
+          <a:xfrm>
+            <a:off x="7612380" y="1920240"/>
+            <a:ext cx="1257300" cy="274320"/>
+          </a:xfrm>
+          <a:prstGeom prst="rect">
+            <a:avLst/>
+          </a:prstGeom>
+          <a:noFill/>
+          <a:ln/>
+        </p:spPr>
+        <p:txBody>
+          <a:bodyPr wrap="square" lIns="0" tIns="0" rIns="0" bIns="0" rtlCol="0" anchor="ctr"/>
+          <a:lstStyle/>
+          <a:p>
+            <a:pPr marL="0" indent="0" algn="ctr">
+              <a:buNone/>
+            </a:pPr>
+            <a:r>
+              <a:rPr lang="en-US" sz="1200" b="1" dirty="0">
+                <a:solidFill>
+                  <a:srgbClr val="FFFFFF"/>
+                </a:solidFill>
+              </a:rPr>
+              <a:t>25%</a:t>
+            </a:r>
+            <a:endParaRPr lang="en-US" sz="1200" dirty="0"/>
+          </a:p>
+        </p:txBody>
+      </p:sp>
+      <p:sp>
+        <p:nvSpPr>
+          <p:cNvPr id="53" name="Text 53"/>
+          <p:cNvSpPr/>
+          <p:nvPr/>
+        </p:nvSpPr>
+        <p:spPr>
+          <a:xfrm>
+            <a:off x="7703820" y="2267712"/>
+            <a:ext cx="1074420" cy="457200"/>
+          </a:xfrm>
+          <a:prstGeom prst="rect">
+            <a:avLst/>
+          </a:prstGeom>
+          <a:noFill/>
+          <a:ln/>
+        </p:spPr>
+        <p:txBody>
+          <a:bodyPr wrap="square" rtlCol="0" anchor="ctr"/>
+          <a:lstStyle/>
+          <a:p>
+            <a:pPr marL="0" indent="0" algn="ctr">
+              <a:buNone/>
+            </a:pPr>
+            <a:r>
+              <a:rPr lang="en-US" sz="1200" b="1" dirty="0">
+                <a:solidFill>
+                  <a:srgbClr val="1E2530"/>
+                </a:solidFill>
+              </a:rPr>
+              <a:t>LLM Validation</a:t>
+            </a:r>
+            <a:endParaRPr lang="en-US" sz="1200" dirty="0"/>
+          </a:p>
+        </p:txBody>
+      </p:sp>
+      <p:sp>
+        <p:nvSpPr>
+          <p:cNvPr id="54" name="Text 54"/>
+          <p:cNvSpPr/>
+          <p:nvPr/>
+        </p:nvSpPr>
+        <p:spPr>
+          <a:xfrm>
+            <a:off x="7703820" y="2788920"/>
+            <a:ext cx="1074420" cy="1280160"/>
+          </a:xfrm>
+          <a:prstGeom prst="rect">
+            <a:avLst/>
+          </a:prstGeom>
+          <a:noFill/>
+          <a:ln/>
+        </p:spPr>
+        <p:txBody>
+          <a:bodyPr wrap="square" rtlCol="0" anchor="ctr"/>
+          <a:lstStyle/>
+          <a:p>
+            <a:pPr marL="0" indent="0">
+              <a:buNone/>
+            </a:pPr>
+            <a:r>
+              <a:rPr lang="en-US" sz="1000" dirty="0">
+                <a:solidFill>
+                  <a:srgbClr val="36454F"/>
+                </a:solidFill>
+              </a:rPr>
+              <a:t>A fresh LLM runs your docs. You hand-verify, reconcile, and recommend.</a:t>
+            </a:r>
+            <a:endParaRPr lang="en-US" sz="1000" dirty="0"/>
+          </a:p>
+        </p:txBody>
+      </p:sp>
+      <p:sp>
+        <p:nvSpPr>
+          <p:cNvPr id="55" name="Shape 55"/>
+          <p:cNvSpPr/>
+          <p:nvPr/>
+        </p:nvSpPr>
+        <p:spPr>
+          <a:xfrm>
+            <a:off x="7703820" y="4160520"/>
+            <a:ext cx="1074420" cy="347472"/>
+          </a:xfrm>
+          <a:prstGeom prst="rect">
+            <a:avLst/>
+          </a:prstGeom>
+          <a:solidFill>
+            <a:srgbClr val="F5F5F3"/>
+          </a:solidFill>
+          <a:ln w="12700">
+            <a:solidFill>
+              <a:srgbClr val="8A9BAD"/>
+            </a:solidFill>
+            <a:prstDash val="solid"/>
+          </a:ln>
+        </p:spPr>
+        <p:txBody>
+          <a:bodyPr/>
+          <a:lstStyle/>
+          <a:p>
+            <a:endParaRPr lang="en-US"/>
+          </a:p>
+        </p:txBody>
+      </p:sp>
+      <p:sp>
+        <p:nvSpPr>
+          <p:cNvPr id="56" name="Text 56"/>
+          <p:cNvSpPr/>
+          <p:nvPr/>
+        </p:nvSpPr>
+        <p:spPr>
+          <a:xfrm>
+            <a:off x="7703820" y="4160520"/>
+            <a:ext cx="1074420" cy="347472"/>
+          </a:xfrm>
+          <a:prstGeom prst="rect">
+            <a:avLst/>
+          </a:prstGeom>
+          <a:noFill/>
+          <a:ln/>
+        </p:spPr>
+        <p:txBody>
+          <a:bodyPr wrap="square" rtlCol="0" anchor="ctr"/>
+          <a:lstStyle/>
+          <a:p>
+            <a:pPr marL="0" indent="0" algn="ctr">
+              <a:buNone/>
+            </a:pPr>
+            <a:r>
+              <a:rPr lang="en-US" sz="850" i="1" dirty="0">
+                <a:solidFill>
+                  <a:srgbClr val="1E2530"/>
+                </a:solidFill>
+              </a:rPr>
+              <a:t>validation doc + rec memo</a:t>
+            </a:r>
+            <a:endParaRPr lang="en-US" sz="850" dirty="0"/>
+          </a:p>
+        </p:txBody>
+      </p:sp>
+      <p:sp>
+        <p:nvSpPr>
+          <p:cNvPr id="57" name="Shape 57"/>
+          <p:cNvSpPr/>
+          <p:nvPr/>
+        </p:nvSpPr>
+        <p:spPr>
+          <a:xfrm>
+            <a:off x="5934456" y="2971800"/>
+            <a:ext cx="210312" cy="0"/>
+          </a:xfrm>
+          <a:prstGeom prst="line">
+            <a:avLst/>
+          </a:prstGeom>
+          <a:noFill/>
+          <a:ln w="19050">
+            <a:solidFill>
+              <a:srgbClr val="C9CFD6"/>
+            </a:solidFill>
+            <a:prstDash val="dash"/>
+          </a:ln>
+        </p:spPr>
+        <p:txBody>
+          <a:bodyPr/>
+          <a:lstStyle/>
+          <a:p>
+            <a:endParaRPr lang="en-US"/>
+          </a:p>
+        </p:txBody>
+      </p:sp>
+      <p:sp>
+        <p:nvSpPr>
+          <p:cNvPr id="58" name="Shape 58"/>
+          <p:cNvSpPr/>
+          <p:nvPr/>
+        </p:nvSpPr>
+        <p:spPr>
+          <a:xfrm>
+            <a:off x="7402068" y="2971800"/>
+            <a:ext cx="210312" cy="0"/>
+          </a:xfrm>
+          <a:prstGeom prst="line">
+            <a:avLst/>
+          </a:prstGeom>
+          <a:noFill/>
+          <a:ln w="19050">
+            <a:solidFill>
+              <a:srgbClr val="C9CFD6"/>
+            </a:solidFill>
+            <a:prstDash val="dash"/>
+          </a:ln>
+        </p:spPr>
+        <p:txBody>
+          <a:bodyPr/>
+          <a:lstStyle/>
+          <a:p>
+            <a:endParaRPr lang="en-US"/>
+          </a:p>
+        </p:txBody>
+      </p:sp>
+    </p:spTree>
+  </p:cSld>
+  <p:clrMapOvr>
+    <a:masterClrMapping/>
+  </p:clrMapOvr>
+</p:sld>
+</file>
+
+<file path=ppt/slides/slide30.xml><?xml version="1.0" encoding="utf-8"?>
+<p:sld xmlns:a="http://schemas.openxmlformats.org/drawingml/2006/main" xmlns:r="http://schemas.openxmlformats.org/officeDocument/2006/relationships" xmlns:p="http://schemas.openxmlformats.org/presentationml/2006/main">
+  <p:cSld name="Slide 7">
+    <p:bg>
+      <p:bgPr>
+        <a:solidFill>
+          <a:srgbClr val="FAF9F7"/>
+        </a:solidFill>
+        <a:effectLst/>
+      </p:bgPr>
+    </p:bg>
+    <p:spTree>
+      <p:nvGrpSpPr>
+        <p:cNvPr id="1" name=""/>
+        <p:cNvGrpSpPr/>
+        <p:nvPr/>
+      </p:nvGrpSpPr>
+      <p:grpSpPr>
+        <a:xfrm>
+          <a:off x="0" y="0"/>
+          <a:ext cx="0" cy="0"/>
+          <a:chOff x="0" y="0"/>
+          <a:chExt cx="0" cy="0"/>
+        </a:xfrm>
+      </p:grpSpPr>
+      <p:sp>
+        <p:nvSpPr>
+          <p:cNvPr id="2" name="Shape 0"/>
+          <p:cNvSpPr/>
+          <p:nvPr/>
+        </p:nvSpPr>
+        <p:spPr>
+          <a:xfrm>
+            <a:off x="0" y="0"/>
+            <a:ext cx="9144000" cy="960120"/>
+          </a:xfrm>
+          <a:prstGeom prst="rect">
+            <a:avLst/>
+          </a:prstGeom>
+          <a:solidFill>
+            <a:srgbClr val="1E2530"/>
+          </a:solidFill>
+          <a:ln w="12700">
+            <a:solidFill>
+              <a:srgbClr val="1E2530"/>
+            </a:solidFill>
+            <a:prstDash val="solid"/>
+          </a:ln>
+        </p:spPr>
+        <p:txBody>
+          <a:bodyPr/>
+          <a:lstStyle/>
+          <a:p>
+            <a:endParaRPr lang="en-US"/>
+          </a:p>
+        </p:txBody>
+      </p:sp>
+      <p:sp>
+        <p:nvSpPr>
+          <p:cNvPr id="3" name="Shape 1"/>
+          <p:cNvSpPr/>
+          <p:nvPr/>
+        </p:nvSpPr>
+        <p:spPr>
+          <a:xfrm>
+            <a:off x="0" y="960120"/>
+            <a:ext cx="9144000" cy="64008"/>
+          </a:xfrm>
+          <a:prstGeom prst="rect">
+            <a:avLst/>
+          </a:prstGeom>
+          <a:solidFill>
+            <a:srgbClr val="B8975C"/>
+          </a:solidFill>
+          <a:ln w="12700">
+            <a:solidFill>
+              <a:srgbClr val="B8975C"/>
+            </a:solidFill>
+            <a:prstDash val="solid"/>
+          </a:ln>
+        </p:spPr>
+        <p:txBody>
+          <a:bodyPr/>
+          <a:lstStyle/>
+          <a:p>
+            <a:endParaRPr lang="en-US"/>
+          </a:p>
+        </p:txBody>
+      </p:sp>
+      <p:sp>
+        <p:nvSpPr>
+          <p:cNvPr id="4" name="Text 2"/>
+          <p:cNvSpPr/>
+          <p:nvPr/>
+        </p:nvSpPr>
+        <p:spPr>
+          <a:xfrm>
+            <a:off x="411480" y="0"/>
+            <a:ext cx="8321040" cy="960120"/>
+          </a:xfrm>
+          <a:prstGeom prst="rect">
+            <a:avLst/>
+          </a:prstGeom>
+          <a:noFill/>
+          <a:ln/>
+        </p:spPr>
+        <p:txBody>
+          <a:bodyPr wrap="square" rtlCol="0" anchor="ctr"/>
+          <a:lstStyle/>
+          <a:p>
+            <a:pPr marL="0" indent="0">
+              <a:buNone/>
+            </a:pPr>
+            <a:r>
+              <a:rPr lang="en-US" sz="2200" b="1" dirty="0">
+                <a:solidFill>
+                  <a:srgbClr val="FFFFFF"/>
+                </a:solidFill>
+                <a:latin typeface="Georgia" pitchFamily="34" charset="0"/>
+                <a:ea typeface="Georgia" pitchFamily="34" charset="-122"/>
+                <a:cs typeface="Georgia" pitchFamily="34" charset="-120"/>
+              </a:rPr>
+              <a:t>Stage 4 — Market Data + Population  ·  12% of Project</a:t>
+            </a:r>
+            <a:endParaRPr lang="en-US" sz="2200" dirty="0"/>
+          </a:p>
+        </p:txBody>
+      </p:sp>
+      <p:sp>
+        <p:nvSpPr>
+          <p:cNvPr id="5" name="Shape 3"/>
+          <p:cNvSpPr/>
+          <p:nvPr/>
+        </p:nvSpPr>
+        <p:spPr>
+          <a:xfrm>
+            <a:off x="365760" y="1143000"/>
+            <a:ext cx="8412480" cy="502920"/>
+          </a:xfrm>
+          <a:prstGeom prst="rect">
+            <a:avLst/>
+          </a:prstGeom>
+          <a:solidFill>
+            <a:srgbClr val="F5F5F3"/>
+          </a:solidFill>
+          <a:ln w="12700">
+            <a:solidFill>
+              <a:srgbClr val="8A9BAD"/>
+            </a:solidFill>
+            <a:prstDash val="solid"/>
+          </a:ln>
+        </p:spPr>
+        <p:txBody>
+          <a:bodyPr/>
+          <a:lstStyle/>
+          <a:p>
+            <a:endParaRPr lang="en-US"/>
+          </a:p>
+        </p:txBody>
+      </p:sp>
+      <p:sp>
+        <p:nvSpPr>
+          <p:cNvPr id="6" name="Text 4"/>
+          <p:cNvSpPr/>
+          <p:nvPr/>
+        </p:nvSpPr>
+        <p:spPr>
+          <a:xfrm>
+            <a:off x="502920" y="1143000"/>
+            <a:ext cx="8229600" cy="502920"/>
+          </a:xfrm>
+          <a:prstGeom prst="rect">
+            <a:avLst/>
+          </a:prstGeom>
+          <a:noFill/>
+          <a:ln/>
+        </p:spPr>
+        <p:txBody>
+          <a:bodyPr wrap="square" rtlCol="0" anchor="ctr"/>
+          <a:lstStyle/>
+          <a:p>
+            <a:pPr marL="0" indent="0">
+              <a:buNone/>
+            </a:pPr>
+            <a:r>
+              <a:rPr lang="en-US" sz="1200" dirty="0">
+                <a:solidFill>
+                  <a:srgbClr val="1E2530"/>
+                </a:solidFill>
+              </a:rPr>
+              <a:t>🎯  GOAL  Replace placeholders with live market data, document where every number came from, and confirm the model survives contact with reality. Everyone pulls on their own date — your numbers are unique, on purpose.</a:t>
+            </a:r>
+            <a:endParaRPr lang="en-US" sz="1200" dirty="0"/>
+          </a:p>
+        </p:txBody>
+      </p:sp>
+      <p:sp>
+        <p:nvSpPr>
+          <p:cNvPr id="7" name="Text 5"/>
+          <p:cNvSpPr/>
+          <p:nvPr/>
+        </p:nvSpPr>
+        <p:spPr>
+          <a:xfrm>
+            <a:off x="365760" y="1783080"/>
+            <a:ext cx="4023360" cy="347472"/>
+          </a:xfrm>
+          <a:prstGeom prst="rect">
+            <a:avLst/>
+          </a:prstGeom>
+          <a:noFill/>
+          <a:ln/>
+        </p:spPr>
+        <p:txBody>
+          <a:bodyPr wrap="square" rtlCol="0" anchor="ctr"/>
+          <a:lstStyle/>
+          <a:p>
+            <a:pPr marL="0" indent="0">
+              <a:buNone/>
+            </a:pPr>
+            <a:r>
+              <a:rPr lang="en-US" sz="1400" b="1" dirty="0">
+                <a:solidFill>
+                  <a:srgbClr val="1E2530"/>
+                </a:solidFill>
+              </a:rPr>
+              <a:t>Retrieve (record source + timestamp)</a:t>
+            </a:r>
+            <a:endParaRPr lang="en-US" sz="1400" dirty="0"/>
+          </a:p>
+        </p:txBody>
+      </p:sp>
+      <p:sp>
+        <p:nvSpPr>
+          <p:cNvPr id="8" name="Shape 6"/>
+          <p:cNvSpPr/>
+          <p:nvPr/>
+        </p:nvSpPr>
+        <p:spPr>
+          <a:xfrm>
+            <a:off x="365760" y="2212848"/>
+            <a:ext cx="320040" cy="320040"/>
+          </a:xfrm>
+          <a:prstGeom prst="rect">
+            <a:avLst/>
+          </a:prstGeom>
+          <a:solidFill>
+            <a:srgbClr val="B8975C"/>
+          </a:solidFill>
+          <a:ln w="12700">
+            <a:solidFill>
+              <a:srgbClr val="B8975C"/>
+            </a:solidFill>
+            <a:prstDash val="solid"/>
+          </a:ln>
+        </p:spPr>
+        <p:txBody>
+          <a:bodyPr/>
+          <a:lstStyle/>
+          <a:p>
+            <a:endParaRPr lang="en-US"/>
+          </a:p>
+        </p:txBody>
+      </p:sp>
+      <p:sp>
+        <p:nvSpPr>
+          <p:cNvPr id="9" name="Text 7"/>
+          <p:cNvSpPr/>
+          <p:nvPr/>
+        </p:nvSpPr>
+        <p:spPr>
+          <a:xfrm>
+            <a:off x="365760" y="2212848"/>
+            <a:ext cx="320040" cy="320040"/>
+          </a:xfrm>
+          <a:prstGeom prst="rect">
+            <a:avLst/>
+          </a:prstGeom>
+          <a:noFill/>
+          <a:ln/>
+        </p:spPr>
+        <p:txBody>
+          <a:bodyPr wrap="square" lIns="0" tIns="0" rIns="0" bIns="0" rtlCol="0" anchor="ctr"/>
+          <a:lstStyle/>
+          <a:p>
+            <a:pPr marL="0" indent="0" algn="ctr">
+              <a:buNone/>
+            </a:pPr>
+            <a:r>
+              <a:rPr lang="en-US" sz="1100" b="1" dirty="0">
+                <a:solidFill>
+                  <a:srgbClr val="1E2530"/>
+                </a:solidFill>
+              </a:rPr>
+              <a:t>A</a:t>
+            </a:r>
+            <a:endParaRPr lang="en-US" sz="1100" dirty="0"/>
+          </a:p>
+        </p:txBody>
+      </p:sp>
+      <p:sp>
+        <p:nvSpPr>
+          <p:cNvPr id="10" name="Text 8"/>
+          <p:cNvSpPr/>
+          <p:nvPr/>
+        </p:nvSpPr>
+        <p:spPr>
+          <a:xfrm>
+            <a:off x="777240" y="2212848"/>
+            <a:ext cx="1463040" cy="320040"/>
+          </a:xfrm>
+          <a:prstGeom prst="rect">
+            <a:avLst/>
+          </a:prstGeom>
+          <a:noFill/>
+          <a:ln/>
+        </p:spPr>
+        <p:txBody>
+          <a:bodyPr wrap="square" lIns="0" tIns="0" rIns="0" bIns="0" rtlCol="0" anchor="ctr"/>
+          <a:lstStyle/>
+          <a:p>
+            <a:pPr marL="0" indent="0">
+              <a:buNone/>
+            </a:pPr>
+            <a:r>
+              <a:rPr lang="en-US" sz="1100" b="1" dirty="0">
+                <a:solidFill>
+                  <a:srgbClr val="1E2530"/>
+                </a:solidFill>
+              </a:rPr>
+              <a:t>Spot — S0_in</a:t>
+            </a:r>
+            <a:endParaRPr lang="en-US" sz="1100" dirty="0"/>
+          </a:p>
+        </p:txBody>
+      </p:sp>
+      <p:sp>
+        <p:nvSpPr>
+          <p:cNvPr id="11" name="Text 9"/>
+          <p:cNvSpPr/>
+          <p:nvPr/>
+        </p:nvSpPr>
+        <p:spPr>
+          <a:xfrm>
+            <a:off x="2286000" y="2212848"/>
+            <a:ext cx="2103120" cy="320040"/>
+          </a:xfrm>
+          <a:prstGeom prst="rect">
+            <a:avLst/>
+          </a:prstGeom>
+          <a:noFill/>
+          <a:ln/>
+        </p:spPr>
+        <p:txBody>
+          <a:bodyPr wrap="square" lIns="0" tIns="0" rIns="0" bIns="0" rtlCol="0" anchor="ctr"/>
+          <a:lstStyle/>
+          <a:p>
+            <a:pPr marL="0" indent="0">
+              <a:buNone/>
+            </a:pPr>
+            <a:r>
+              <a:rPr lang="en-US" sz="950" dirty="0">
+                <a:solidFill>
+                  <a:srgbClr val="36454F"/>
+                </a:solidFill>
+              </a:rPr>
+              <a:t>Any reputable source: Yahoo Finance, investing.com, ECB fix, a Bloomberg terminal</a:t>
+            </a:r>
+            <a:endParaRPr lang="en-US" sz="950" dirty="0"/>
+          </a:p>
+        </p:txBody>
+      </p:sp>
+      <p:sp>
+        <p:nvSpPr>
+          <p:cNvPr id="12" name="Shape 10"/>
+          <p:cNvSpPr/>
+          <p:nvPr/>
+        </p:nvSpPr>
+        <p:spPr>
+          <a:xfrm>
+            <a:off x="365760" y="2706624"/>
+            <a:ext cx="320040" cy="320040"/>
+          </a:xfrm>
+          <a:prstGeom prst="rect">
+            <a:avLst/>
+          </a:prstGeom>
+          <a:solidFill>
+            <a:srgbClr val="B8975C"/>
+          </a:solidFill>
+          <a:ln w="12700">
+            <a:solidFill>
+              <a:srgbClr val="B8975C"/>
+            </a:solidFill>
+            <a:prstDash val="solid"/>
+          </a:ln>
+        </p:spPr>
+        <p:txBody>
+          <a:bodyPr/>
+          <a:lstStyle/>
+          <a:p>
+            <a:endParaRPr lang="en-US"/>
+          </a:p>
+        </p:txBody>
+      </p:sp>
+      <p:sp>
+        <p:nvSpPr>
+          <p:cNvPr id="13" name="Text 11"/>
+          <p:cNvSpPr/>
+          <p:nvPr/>
+        </p:nvSpPr>
+        <p:spPr>
+          <a:xfrm>
+            <a:off x="365760" y="2706624"/>
+            <a:ext cx="320040" cy="320040"/>
+          </a:xfrm>
+          <a:prstGeom prst="rect">
+            <a:avLst/>
+          </a:prstGeom>
+          <a:noFill/>
+          <a:ln/>
+        </p:spPr>
+        <p:txBody>
+          <a:bodyPr wrap="square" lIns="0" tIns="0" rIns="0" bIns="0" rtlCol="0" anchor="ctr"/>
+          <a:lstStyle/>
+          <a:p>
+            <a:pPr marL="0" indent="0" algn="ctr">
+              <a:buNone/>
+            </a:pPr>
+            <a:r>
+              <a:rPr lang="en-US" sz="1100" b="1" dirty="0">
+                <a:solidFill>
+                  <a:srgbClr val="1E2530"/>
+                </a:solidFill>
+              </a:rPr>
+              <a:t>B</a:t>
+            </a:r>
+            <a:endParaRPr lang="en-US" sz="1100" dirty="0"/>
+          </a:p>
+        </p:txBody>
+      </p:sp>
+      <p:sp>
+        <p:nvSpPr>
+          <p:cNvPr id="14" name="Text 12"/>
+          <p:cNvSpPr/>
+          <p:nvPr/>
+        </p:nvSpPr>
+        <p:spPr>
+          <a:xfrm>
+            <a:off x="777240" y="2706624"/>
+            <a:ext cx="1463040" cy="320040"/>
+          </a:xfrm>
+          <a:prstGeom prst="rect">
+            <a:avLst/>
+          </a:prstGeom>
+          <a:noFill/>
+          <a:ln/>
+        </p:spPr>
+        <p:txBody>
+          <a:bodyPr wrap="square" lIns="0" tIns="0" rIns="0" bIns="0" rtlCol="0" anchor="ctr"/>
+          <a:lstStyle/>
+          <a:p>
+            <a:pPr marL="0" indent="0">
+              <a:buNone/>
+            </a:pPr>
+            <a:r>
+              <a:rPr lang="en-US" sz="1100" b="1" dirty="0">
+                <a:solidFill>
+                  <a:srgbClr val="1E2530"/>
+                </a:solidFill>
+              </a:rPr>
+              <a:t>Rates — R_USD, R_FC</a:t>
+            </a:r>
+            <a:endParaRPr lang="en-US" sz="1100" dirty="0"/>
+          </a:p>
+        </p:txBody>
+      </p:sp>
+      <p:sp>
+        <p:nvSpPr>
+          <p:cNvPr id="15" name="Text 13"/>
+          <p:cNvSpPr/>
+          <p:nvPr/>
+        </p:nvSpPr>
+        <p:spPr>
+          <a:xfrm>
+            <a:off x="2286000" y="2706624"/>
+            <a:ext cx="2103120" cy="320040"/>
+          </a:xfrm>
+          <a:prstGeom prst="rect">
+            <a:avLst/>
+          </a:prstGeom>
+          <a:noFill/>
+          <a:ln/>
+        </p:spPr>
+        <p:txBody>
+          <a:bodyPr wrap="square" lIns="0" tIns="0" rIns="0" bIns="0" rtlCol="0" anchor="ctr"/>
+          <a:lstStyle/>
+          <a:p>
+            <a:pPr marL="0" indent="0">
+              <a:buNone/>
+            </a:pPr>
+            <a:r>
+              <a:rPr lang="en-US" sz="950" dirty="0">
+                <a:solidFill>
+                  <a:srgbClr val="36454F"/>
+                </a:solidFill>
+              </a:rPr>
+              <a:t>1-year government yield or reference rate per currency — document which and why</a:t>
+            </a:r>
+            <a:endParaRPr lang="en-US" sz="950" dirty="0"/>
+          </a:p>
+        </p:txBody>
+      </p:sp>
+      <p:sp>
+        <p:nvSpPr>
+          <p:cNvPr id="16" name="Shape 14"/>
+          <p:cNvSpPr/>
+          <p:nvPr/>
+        </p:nvSpPr>
+        <p:spPr>
+          <a:xfrm>
+            <a:off x="365760" y="3200400"/>
+            <a:ext cx="320040" cy="320040"/>
+          </a:xfrm>
+          <a:prstGeom prst="rect">
+            <a:avLst/>
+          </a:prstGeom>
+          <a:solidFill>
+            <a:srgbClr val="B8975C"/>
+          </a:solidFill>
+          <a:ln w="12700">
+            <a:solidFill>
+              <a:srgbClr val="B8975C"/>
+            </a:solidFill>
+            <a:prstDash val="solid"/>
+          </a:ln>
+        </p:spPr>
+        <p:txBody>
+          <a:bodyPr/>
+          <a:lstStyle/>
+          <a:p>
+            <a:endParaRPr lang="en-US"/>
+          </a:p>
+        </p:txBody>
+      </p:sp>
+      <p:sp>
+        <p:nvSpPr>
+          <p:cNvPr id="17" name="Text 15"/>
+          <p:cNvSpPr/>
+          <p:nvPr/>
+        </p:nvSpPr>
+        <p:spPr>
+          <a:xfrm>
+            <a:off x="365760" y="3200400"/>
+            <a:ext cx="320040" cy="320040"/>
+          </a:xfrm>
+          <a:prstGeom prst="rect">
+            <a:avLst/>
+          </a:prstGeom>
+          <a:noFill/>
+          <a:ln/>
+        </p:spPr>
+        <p:txBody>
+          <a:bodyPr wrap="square" lIns="0" tIns="0" rIns="0" bIns="0" rtlCol="0" anchor="ctr"/>
+          <a:lstStyle/>
+          <a:p>
+            <a:pPr marL="0" indent="0" algn="ctr">
+              <a:buNone/>
+            </a:pPr>
+            <a:r>
+              <a:rPr lang="en-US" sz="1100" b="1" dirty="0">
+                <a:solidFill>
+                  <a:srgbClr val="1E2530"/>
+                </a:solidFill>
+              </a:rPr>
+              <a:t>C</a:t>
+            </a:r>
+            <a:endParaRPr lang="en-US" sz="1100" dirty="0"/>
+          </a:p>
+        </p:txBody>
+      </p:sp>
+      <p:sp>
+        <p:nvSpPr>
+          <p:cNvPr id="18" name="Text 16"/>
+          <p:cNvSpPr/>
+          <p:nvPr/>
+        </p:nvSpPr>
+        <p:spPr>
+          <a:xfrm>
+            <a:off x="777240" y="3200400"/>
+            <a:ext cx="1463040" cy="320040"/>
+          </a:xfrm>
+          <a:prstGeom prst="rect">
+            <a:avLst/>
+          </a:prstGeom>
+          <a:noFill/>
+          <a:ln/>
+        </p:spPr>
+        <p:txBody>
+          <a:bodyPr wrap="square" lIns="0" tIns="0" rIns="0" bIns="0" rtlCol="0" anchor="ctr"/>
+          <a:lstStyle/>
+          <a:p>
+            <a:pPr marL="0" indent="0">
+              <a:buNone/>
+            </a:pPr>
+            <a:r>
+              <a:rPr lang="en-US" sz="1100" b="1" dirty="0">
+                <a:solidFill>
+                  <a:srgbClr val="1E2530"/>
+                </a:solidFill>
+              </a:rPr>
+              <a:t>Forward — F0_in</a:t>
+            </a:r>
+            <a:endParaRPr lang="en-US" sz="1100" dirty="0"/>
+          </a:p>
+        </p:txBody>
+      </p:sp>
+      <p:sp>
+        <p:nvSpPr>
+          <p:cNvPr id="19" name="Text 17"/>
+          <p:cNvSpPr/>
+          <p:nvPr/>
+        </p:nvSpPr>
+        <p:spPr>
+          <a:xfrm>
+            <a:off x="2286000" y="3200400"/>
+            <a:ext cx="2103120" cy="320040"/>
+          </a:xfrm>
+          <a:prstGeom prst="rect">
+            <a:avLst/>
+          </a:prstGeom>
+          <a:noFill/>
+          <a:ln/>
+        </p:spPr>
+        <p:txBody>
+          <a:bodyPr wrap="square" lIns="0" tIns="0" rIns="0" bIns="0" rtlCol="0" anchor="ctr"/>
+          <a:lstStyle/>
+          <a:p>
+            <a:pPr marL="0" indent="0">
+              <a:buNone/>
+            </a:pPr>
+            <a:r>
+              <a:rPr lang="en-US" sz="950" dirty="0">
+                <a:solidFill>
+                  <a:srgbClr val="36454F"/>
+                </a:solidFill>
+              </a:rPr>
+              <a:t>Live quote if you can find one; otherwise CIP-implied from spot + rates — and say so</a:t>
+            </a:r>
+            <a:endParaRPr lang="en-US" sz="950" dirty="0"/>
+          </a:p>
+        </p:txBody>
+      </p:sp>
+      <p:sp>
+        <p:nvSpPr>
+          <p:cNvPr id="20" name="Shape 18"/>
+          <p:cNvSpPr/>
+          <p:nvPr/>
+        </p:nvSpPr>
+        <p:spPr>
+          <a:xfrm>
+            <a:off x="365760" y="3694176"/>
+            <a:ext cx="320040" cy="320040"/>
+          </a:xfrm>
+          <a:prstGeom prst="rect">
+            <a:avLst/>
+          </a:prstGeom>
+          <a:solidFill>
+            <a:srgbClr val="B8975C"/>
+          </a:solidFill>
+          <a:ln w="12700">
+            <a:solidFill>
+              <a:srgbClr val="B8975C"/>
+            </a:solidFill>
+            <a:prstDash val="solid"/>
+          </a:ln>
+        </p:spPr>
+        <p:txBody>
+          <a:bodyPr/>
+          <a:lstStyle/>
+          <a:p>
+            <a:endParaRPr lang="en-US"/>
+          </a:p>
+        </p:txBody>
+      </p:sp>
+      <p:sp>
+        <p:nvSpPr>
+          <p:cNvPr id="21" name="Text 19"/>
+          <p:cNvSpPr/>
+          <p:nvPr/>
+        </p:nvSpPr>
+        <p:spPr>
+          <a:xfrm>
+            <a:off x="365760" y="3694176"/>
+            <a:ext cx="320040" cy="320040"/>
+          </a:xfrm>
+          <a:prstGeom prst="rect">
+            <a:avLst/>
+          </a:prstGeom>
+          <a:noFill/>
+          <a:ln/>
+        </p:spPr>
+        <p:txBody>
+          <a:bodyPr wrap="square" lIns="0" tIns="0" rIns="0" bIns="0" rtlCol="0" anchor="ctr"/>
+          <a:lstStyle/>
+          <a:p>
+            <a:pPr marL="0" indent="0" algn="ctr">
+              <a:buNone/>
+            </a:pPr>
+            <a:r>
+              <a:rPr lang="en-US" sz="1100" b="1" dirty="0">
+                <a:solidFill>
+                  <a:srgbClr val="1E2530"/>
+                </a:solidFill>
+              </a:rPr>
+              <a:t>D</a:t>
+            </a:r>
+            <a:endParaRPr lang="en-US" sz="1100" dirty="0"/>
+          </a:p>
+        </p:txBody>
+      </p:sp>
+      <p:sp>
+        <p:nvSpPr>
+          <p:cNvPr id="22" name="Text 20"/>
+          <p:cNvSpPr/>
+          <p:nvPr/>
+        </p:nvSpPr>
+        <p:spPr>
+          <a:xfrm>
+            <a:off x="777240" y="3694176"/>
+            <a:ext cx="1463040" cy="320040"/>
+          </a:xfrm>
+          <a:prstGeom prst="rect">
+            <a:avLst/>
+          </a:prstGeom>
+          <a:noFill/>
+          <a:ln/>
+        </p:spPr>
+        <p:txBody>
+          <a:bodyPr wrap="square" lIns="0" tIns="0" rIns="0" bIns="0" rtlCol="0" anchor="ctr"/>
+          <a:lstStyle/>
+          <a:p>
+            <a:pPr marL="0" indent="0">
+              <a:buNone/>
+            </a:pPr>
+            <a:r>
+              <a:rPr lang="en-US" sz="1100" b="1" dirty="0">
+                <a:solidFill>
+                  <a:srgbClr val="1E2530"/>
+                </a:solidFill>
+              </a:rPr>
+              <a:t>Strikes — K_PUT, K_CALL</a:t>
+            </a:r>
+            <a:endParaRPr lang="en-US" sz="1100" dirty="0"/>
+          </a:p>
+        </p:txBody>
+      </p:sp>
+      <p:sp>
+        <p:nvSpPr>
+          <p:cNvPr id="23" name="Text 21"/>
+          <p:cNvSpPr/>
+          <p:nvPr/>
+        </p:nvSpPr>
+        <p:spPr>
+          <a:xfrm>
+            <a:off x="2286000" y="3694176"/>
+            <a:ext cx="2103120" cy="320040"/>
+          </a:xfrm>
+          <a:prstGeom prst="rect">
+            <a:avLst/>
+          </a:prstGeom>
+          <a:noFill/>
+          <a:ln/>
+        </p:spPr>
+        <p:txBody>
+          <a:bodyPr wrap="square" lIns="0" tIns="0" rIns="0" bIns="0" rtlCol="0" anchor="ctr"/>
+          <a:lstStyle/>
+          <a:p>
+            <a:pPr marL="0" indent="0">
+              <a:buNone/>
+            </a:pPr>
+            <a:r>
+              <a:rPr lang="en-US" sz="950" dirty="0">
+                <a:solidFill>
+                  <a:srgbClr val="36454F"/>
+                </a:solidFill>
+              </a:rPr>
+              <a:t>Set at or near your live spot, per the scenario convention</a:t>
+            </a:r>
+            <a:endParaRPr lang="en-US" sz="950" dirty="0"/>
+          </a:p>
+        </p:txBody>
+      </p:sp>
+      <p:sp>
+        <p:nvSpPr>
+          <p:cNvPr id="24" name="Shape 22"/>
+          <p:cNvSpPr/>
+          <p:nvPr/>
+        </p:nvSpPr>
+        <p:spPr>
+          <a:xfrm>
+            <a:off x="365760" y="4187952"/>
+            <a:ext cx="320040" cy="320040"/>
+          </a:xfrm>
+          <a:prstGeom prst="rect">
+            <a:avLst/>
+          </a:prstGeom>
+          <a:solidFill>
+            <a:srgbClr val="B8975C"/>
+          </a:solidFill>
+          <a:ln w="12700">
+            <a:solidFill>
+              <a:srgbClr val="B8975C"/>
+            </a:solidFill>
+            <a:prstDash val="solid"/>
+          </a:ln>
+        </p:spPr>
+        <p:txBody>
+          <a:bodyPr/>
+          <a:lstStyle/>
+          <a:p>
+            <a:endParaRPr lang="en-US"/>
+          </a:p>
+        </p:txBody>
+      </p:sp>
+      <p:sp>
+        <p:nvSpPr>
+          <p:cNvPr id="25" name="Text 23"/>
+          <p:cNvSpPr/>
+          <p:nvPr/>
+        </p:nvSpPr>
+        <p:spPr>
+          <a:xfrm>
+            <a:off x="365760" y="4187952"/>
+            <a:ext cx="320040" cy="320040"/>
+          </a:xfrm>
+          <a:prstGeom prst="rect">
+            <a:avLst/>
+          </a:prstGeom>
+          <a:noFill/>
+          <a:ln/>
+        </p:spPr>
+        <p:txBody>
+          <a:bodyPr wrap="square" lIns="0" tIns="0" rIns="0" bIns="0" rtlCol="0" anchor="ctr"/>
+          <a:lstStyle/>
+          <a:p>
+            <a:pPr marL="0" indent="0" algn="ctr">
+              <a:buNone/>
+            </a:pPr>
+            <a:r>
+              <a:rPr lang="en-US" sz="1100" b="1" dirty="0">
+                <a:solidFill>
+                  <a:srgbClr val="1E2530"/>
+                </a:solidFill>
+              </a:rPr>
+              <a:t>E</a:t>
+            </a:r>
+            <a:endParaRPr lang="en-US" sz="1100" dirty="0"/>
+          </a:p>
+        </p:txBody>
+      </p:sp>
+      <p:sp>
+        <p:nvSpPr>
+          <p:cNvPr id="26" name="Text 24"/>
+          <p:cNvSpPr/>
+          <p:nvPr/>
+        </p:nvSpPr>
+        <p:spPr>
+          <a:xfrm>
+            <a:off x="777240" y="4187952"/>
+            <a:ext cx="1463040" cy="320040"/>
+          </a:xfrm>
+          <a:prstGeom prst="rect">
+            <a:avLst/>
+          </a:prstGeom>
+          <a:noFill/>
+          <a:ln/>
+        </p:spPr>
+        <p:txBody>
+          <a:bodyPr wrap="square" lIns="0" tIns="0" rIns="0" bIns="0" rtlCol="0" anchor="ctr"/>
+          <a:lstStyle/>
+          <a:p>
+            <a:pPr marL="0" indent="0">
+              <a:buNone/>
+            </a:pPr>
+            <a:r>
+              <a:rPr lang="en-US" sz="1100" b="1" dirty="0">
+                <a:solidFill>
+                  <a:srgbClr val="1E2530"/>
+                </a:solidFill>
+              </a:rPr>
+              <a:t>Premiums</a:t>
+            </a:r>
+            <a:endParaRPr lang="en-US" sz="1100" dirty="0"/>
+          </a:p>
+        </p:txBody>
+      </p:sp>
+      <p:sp>
+        <p:nvSpPr>
+          <p:cNvPr id="27" name="Text 25"/>
+          <p:cNvSpPr/>
+          <p:nvPr/>
+        </p:nvSpPr>
+        <p:spPr>
+          <a:xfrm>
+            <a:off x="2286000" y="4187952"/>
+            <a:ext cx="2103120" cy="320040"/>
+          </a:xfrm>
+          <a:prstGeom prst="rect">
+            <a:avLst/>
+          </a:prstGeom>
+          <a:noFill/>
+          <a:ln/>
+        </p:spPr>
+        <p:txBody>
+          <a:bodyPr wrap="square" lIns="0" tIns="0" rIns="0" bIns="0" rtlCol="0" anchor="ctr"/>
+          <a:lstStyle/>
+          <a:p>
+            <a:pPr marL="0" indent="0">
+              <a:buNone/>
+            </a:pPr>
+            <a:r>
+              <a:rPr lang="en-US" sz="950" dirty="0">
+                <a:solidFill>
+                  <a:srgbClr val="36454F"/>
+                </a:solidFill>
+              </a:rPr>
+              <a:t>Keep the scenario premiums; note this explicitly as an assumption</a:t>
+            </a:r>
+            <a:endParaRPr lang="en-US" sz="950" dirty="0"/>
+          </a:p>
+        </p:txBody>
+      </p:sp>
+      <p:sp>
+        <p:nvSpPr>
+          <p:cNvPr id="28" name="Shape 26"/>
+          <p:cNvSpPr/>
+          <p:nvPr/>
+        </p:nvSpPr>
+        <p:spPr>
+          <a:xfrm>
+            <a:off x="4800600" y="1783080"/>
+            <a:ext cx="3977640" cy="2880360"/>
+          </a:xfrm>
+          <a:prstGeom prst="rect">
+            <a:avLst/>
+          </a:prstGeom>
+          <a:solidFill>
+            <a:srgbClr val="1E2530"/>
+          </a:solidFill>
+          <a:ln w="12700">
+            <a:solidFill>
+              <a:srgbClr val="1E2530"/>
+            </a:solidFill>
+            <a:prstDash val="solid"/>
+          </a:ln>
+          <a:effectLst>
+            <a:outerShdw blurRad="101600" dist="38100" dir="8100000" algn="bl" rotWithShape="0">
+              <a:srgbClr val="000000">
+                <a:alpha val="12000"/>
+              </a:srgbClr>
+            </a:outerShdw>
+          </a:effectLst>
+        </p:spPr>
+        <p:txBody>
+          <a:bodyPr/>
+          <a:lstStyle/>
+          <a:p>
+            <a:endParaRPr lang="en-US"/>
+          </a:p>
+        </p:txBody>
+      </p:sp>
+      <p:sp>
+        <p:nvSpPr>
+          <p:cNvPr id="29" name="Text 27"/>
+          <p:cNvSpPr/>
+          <p:nvPr/>
+        </p:nvSpPr>
+        <p:spPr>
+          <a:xfrm>
+            <a:off x="4800600" y="1783080"/>
+            <a:ext cx="3977640" cy="402336"/>
+          </a:xfrm>
+          <a:prstGeom prst="rect">
+            <a:avLst/>
+          </a:prstGeom>
+          <a:noFill/>
+          <a:ln/>
+        </p:spPr>
+        <p:txBody>
+          <a:bodyPr wrap="square" rtlCol="0" anchor="ctr"/>
+          <a:lstStyle/>
+          <a:p>
+            <a:pPr marL="0" indent="0" algn="ctr">
+              <a:buNone/>
+            </a:pPr>
+            <a:r>
+              <a:rPr lang="en-US" sz="1300" b="1" dirty="0">
+                <a:solidFill>
+                  <a:srgbClr val="B8975C"/>
+                </a:solidFill>
+              </a:rPr>
+              <a:t>Then</a:t>
+            </a:r>
+            <a:endParaRPr lang="en-US" sz="1300" dirty="0"/>
+          </a:p>
+        </p:txBody>
+      </p:sp>
+      <p:sp>
+        <p:nvSpPr>
+          <p:cNvPr id="30" name="Text 28"/>
+          <p:cNvSpPr/>
+          <p:nvPr/>
+        </p:nvSpPr>
+        <p:spPr>
+          <a:xfrm>
+            <a:off x="4937760" y="2286000"/>
+            <a:ext cx="3703320" cy="365760"/>
+          </a:xfrm>
+          <a:prstGeom prst="rect">
+            <a:avLst/>
+          </a:prstGeom>
+          <a:noFill/>
+          <a:ln/>
+        </p:spPr>
+        <p:txBody>
+          <a:bodyPr wrap="square" rtlCol="0" anchor="ctr"/>
+          <a:lstStyle/>
+          <a:p>
+            <a:pPr marL="0" indent="0">
+              <a:buNone/>
+            </a:pPr>
+            <a:r>
+              <a:rPr lang="en-US" sz="1050" b="1" dirty="0">
+                <a:solidFill>
+                  <a:srgbClr val="5A6B7A"/>
+                </a:solidFill>
+              </a:rPr>
+              <a:t>✓  </a:t>
+            </a:r>
+            <a:r>
+              <a:rPr lang="en-US" sz="1050" dirty="0">
+                <a:solidFill>
+                  <a:srgbClr val="8A9BAD"/>
+                </a:solidFill>
+              </a:rPr>
+              <a:t>Market-data memo in data/ — value, source, timestamp, proxy logic for every input</a:t>
+            </a:r>
+            <a:endParaRPr lang="en-US" sz="1050" dirty="0"/>
+          </a:p>
+        </p:txBody>
+      </p:sp>
+      <p:sp>
+        <p:nvSpPr>
+          <p:cNvPr id="31" name="Text 29"/>
+          <p:cNvSpPr/>
+          <p:nvPr/>
+        </p:nvSpPr>
+        <p:spPr>
+          <a:xfrm>
+            <a:off x="4937760" y="2688336"/>
+            <a:ext cx="3703320" cy="365760"/>
+          </a:xfrm>
+          <a:prstGeom prst="rect">
+            <a:avLst/>
+          </a:prstGeom>
+          <a:noFill/>
+          <a:ln/>
+        </p:spPr>
+        <p:txBody>
+          <a:bodyPr wrap="square" rtlCol="0" anchor="ctr"/>
+          <a:lstStyle/>
+          <a:p>
+            <a:pPr marL="0" indent="0">
+              <a:buNone/>
+            </a:pPr>
+            <a:r>
+              <a:rPr lang="en-US" sz="1050" b="1" dirty="0">
+                <a:solidFill>
+                  <a:srgbClr val="5A6B7A"/>
+                </a:solidFill>
+              </a:rPr>
+              <a:t>✓  </a:t>
+            </a:r>
+            <a:r>
+              <a:rPr lang="en-US" sz="1050" dirty="0">
+                <a:solidFill>
+                  <a:srgbClr val="8A9BAD"/>
+                </a:solidFill>
+              </a:rPr>
+              <a:t>Populate through the named ranges — nothing else should need to change</a:t>
+            </a:r>
+            <a:endParaRPr lang="en-US" sz="1050" dirty="0"/>
+          </a:p>
+        </p:txBody>
+      </p:sp>
+      <p:sp>
+        <p:nvSpPr>
+          <p:cNvPr id="32" name="Text 30"/>
+          <p:cNvSpPr/>
+          <p:nvPr/>
+        </p:nvSpPr>
+        <p:spPr>
+          <a:xfrm>
+            <a:off x="4937760" y="3090672"/>
+            <a:ext cx="3703320" cy="365760"/>
+          </a:xfrm>
+          <a:prstGeom prst="rect">
+            <a:avLst/>
+          </a:prstGeom>
+          <a:noFill/>
+          <a:ln/>
+        </p:spPr>
+        <p:txBody>
+          <a:bodyPr wrap="square" rtlCol="0" anchor="ctr"/>
+          <a:lstStyle/>
+          <a:p>
+            <a:pPr marL="0" indent="0">
+              <a:buNone/>
+            </a:pPr>
+            <a:r>
+              <a:rPr lang="en-US" sz="1050" b="1" dirty="0">
+                <a:solidFill>
+                  <a:srgbClr val="5A6B7A"/>
+                </a:solidFill>
+              </a:rPr>
+              <a:t>✓  </a:t>
+            </a:r>
+            <a:r>
+              <a:rPr lang="en-US" sz="1050" dirty="0">
+                <a:solidFill>
+                  <a:srgbClr val="8A9BAD"/>
+                </a:solidFill>
+              </a:rPr>
+              <a:t>If something breaks, the structure was wrong — fixing it is the exercise, not a penalty</a:t>
+            </a:r>
+            <a:endParaRPr lang="en-US" sz="1050" dirty="0"/>
+          </a:p>
+        </p:txBody>
+      </p:sp>
+      <p:sp>
+        <p:nvSpPr>
+          <p:cNvPr id="33" name="Text 31"/>
+          <p:cNvSpPr/>
+          <p:nvPr/>
+        </p:nvSpPr>
+        <p:spPr>
+          <a:xfrm>
+            <a:off x="4937760" y="3493008"/>
+            <a:ext cx="3703320" cy="365760"/>
+          </a:xfrm>
+          <a:prstGeom prst="rect">
+            <a:avLst/>
+          </a:prstGeom>
+          <a:noFill/>
+          <a:ln/>
+        </p:spPr>
+        <p:txBody>
+          <a:bodyPr wrap="square" rtlCol="0" anchor="ctr"/>
+          <a:lstStyle/>
+          <a:p>
+            <a:pPr marL="0" indent="0">
+              <a:buNone/>
+            </a:pPr>
+            <a:r>
+              <a:rPr lang="en-US" sz="1050" b="1" dirty="0">
+                <a:solidFill>
+                  <a:srgbClr val="5A6B7A"/>
+                </a:solidFill>
+              </a:rPr>
+              <a:t>✓  </a:t>
+            </a:r>
+            <a:r>
+              <a:rPr lang="en-US" sz="1050" dirty="0">
+                <a:solidFill>
+                  <a:srgbClr val="8A9BAD"/>
+                </a:solidFill>
+              </a:rPr>
+              <a:t>Re-run the checks: parity passes, sensitivity recalculates around the new spot</a:t>
+            </a:r>
+            <a:endParaRPr lang="en-US" sz="1050" dirty="0"/>
+          </a:p>
+        </p:txBody>
+      </p:sp>
+      <p:sp>
+        <p:nvSpPr>
+          <p:cNvPr id="34" name="Text 32"/>
+          <p:cNvSpPr/>
+          <p:nvPr/>
+        </p:nvSpPr>
+        <p:spPr>
+          <a:xfrm>
+            <a:off x="4937760" y="3895344"/>
+            <a:ext cx="3703320" cy="365760"/>
+          </a:xfrm>
+          <a:prstGeom prst="rect">
+            <a:avLst/>
+          </a:prstGeom>
+          <a:noFill/>
+          <a:ln/>
+        </p:spPr>
+        <p:txBody>
+          <a:bodyPr wrap="square" rtlCol="0" anchor="ctr"/>
+          <a:lstStyle/>
+          <a:p>
+            <a:pPr marL="0" indent="0">
+              <a:buNone/>
+            </a:pPr>
+            <a:r>
+              <a:rPr lang="en-US" sz="1050" b="1" dirty="0">
+                <a:solidFill>
+                  <a:srgbClr val="5A6B7A"/>
+                </a:solidFill>
+              </a:rPr>
+              <a:t>✓  </a:t>
+            </a:r>
+            <a:r>
+              <a:rPr lang="en-US" sz="1050" dirty="0">
+                <a:solidFill>
+                  <a:srgbClr val="8A9BAD"/>
+                </a:solidFill>
+              </a:rPr>
+              <a:t>Cross-check against the course website’s FX Hedging Lab; resolve any disagreement</a:t>
+            </a:r>
+            <a:endParaRPr lang="en-US" sz="1050" dirty="0"/>
+          </a:p>
+        </p:txBody>
+      </p:sp>
+      <p:sp>
+        <p:nvSpPr>
+          <p:cNvPr id="35" name="Text 33"/>
+          <p:cNvSpPr/>
+          <p:nvPr/>
+        </p:nvSpPr>
+        <p:spPr>
+          <a:xfrm>
+            <a:off x="4937760" y="4297680"/>
+            <a:ext cx="3703320" cy="365760"/>
+          </a:xfrm>
+          <a:prstGeom prst="rect">
+            <a:avLst/>
+          </a:prstGeom>
+          <a:noFill/>
+          <a:ln/>
+        </p:spPr>
+        <p:txBody>
+          <a:bodyPr wrap="square" rtlCol="0" anchor="ctr"/>
+          <a:lstStyle/>
+          <a:p>
+            <a:pPr marL="0" indent="0">
+              <a:buNone/>
+            </a:pPr>
+            <a:r>
+              <a:rPr lang="en-US" sz="1050" b="1" dirty="0">
+                <a:solidFill>
+                  <a:srgbClr val="5A6B7A"/>
+                </a:solidFill>
+              </a:rPr>
+              <a:t>   </a:t>
+            </a:r>
+            <a:r>
+              <a:rPr lang="en-US" sz="1050" dirty="0">
+                <a:solidFill>
+                  <a:srgbClr val="8A9BAD"/>
+                </a:solidFill>
+              </a:rPr>
+              <a:t> </a:t>
+            </a:r>
+            <a:endParaRPr lang="en-US" sz="1050" dirty="0"/>
+          </a:p>
+        </p:txBody>
+      </p:sp>
+      <p:sp>
+        <p:nvSpPr>
+          <p:cNvPr id="36" name="Shape 34"/>
+          <p:cNvSpPr/>
+          <p:nvPr/>
+        </p:nvSpPr>
+        <p:spPr>
+          <a:xfrm>
+            <a:off x="365760" y="4645152"/>
+            <a:ext cx="4160520" cy="384048"/>
+          </a:xfrm>
+          <a:prstGeom prst="rect">
+            <a:avLst/>
+          </a:prstGeom>
+          <a:solidFill>
+            <a:srgbClr val="FAF9F7"/>
+          </a:solidFill>
+          <a:ln w="12700">
+            <a:solidFill>
+              <a:srgbClr val="B8975C"/>
+            </a:solidFill>
+            <a:prstDash val="solid"/>
+          </a:ln>
+        </p:spPr>
+        <p:txBody>
+          <a:bodyPr/>
+          <a:lstStyle/>
+          <a:p>
+            <a:endParaRPr lang="en-US"/>
+          </a:p>
+        </p:txBody>
+      </p:sp>
+      <p:sp>
+        <p:nvSpPr>
+          <p:cNvPr id="37" name="Text 35"/>
+          <p:cNvSpPr/>
+          <p:nvPr/>
+        </p:nvSpPr>
+        <p:spPr>
+          <a:xfrm>
+            <a:off x="411480" y="4645152"/>
+            <a:ext cx="4114800" cy="384048"/>
+          </a:xfrm>
+          <a:prstGeom prst="rect">
+            <a:avLst/>
+          </a:prstGeom>
+          <a:noFill/>
+          <a:ln/>
+        </p:spPr>
+        <p:txBody>
+          <a:bodyPr wrap="square" rtlCol="0" anchor="ctr"/>
+          <a:lstStyle/>
+          <a:p>
+            <a:pPr marL="0" indent="0">
+              <a:buNone/>
+            </a:pPr>
+            <a:r>
+              <a:rPr lang="en-US" sz="950" dirty="0">
+                <a:solidFill>
+                  <a:srgbClr val="1E2530"/>
+                </a:solidFill>
+              </a:rPr>
+              <a:t>From here, feedback may arrive as a pull request — read the diff, merge, edit on top, or push back with reasons</a:t>
+            </a:r>
+            <a:endParaRPr lang="en-US" sz="950" dirty="0"/>
+          </a:p>
+        </p:txBody>
+      </p:sp>
+      <p:sp>
+        <p:nvSpPr>
+          <p:cNvPr id="38" name="Shape 36"/>
+          <p:cNvSpPr/>
+          <p:nvPr/>
+        </p:nvSpPr>
+        <p:spPr>
+          <a:xfrm>
+            <a:off x="4800600" y="4645152"/>
+            <a:ext cx="3977640" cy="384048"/>
+          </a:xfrm>
+          <a:prstGeom prst="rect">
+            <a:avLst/>
+          </a:prstGeom>
+          <a:solidFill>
+            <a:srgbClr val="5A6B7A"/>
+          </a:solidFill>
+          <a:ln w="12700">
+            <a:solidFill>
+              <a:srgbClr val="5A6B7A"/>
+            </a:solidFill>
+            <a:prstDash val="solid"/>
+          </a:ln>
+        </p:spPr>
+        <p:txBody>
+          <a:bodyPr/>
+          <a:lstStyle/>
+          <a:p>
+            <a:endParaRPr lang="en-US"/>
+          </a:p>
+        </p:txBody>
+      </p:sp>
+      <p:sp>
+        <p:nvSpPr>
+          <p:cNvPr id="39" name="Text 37"/>
+          <p:cNvSpPr/>
+          <p:nvPr/>
+        </p:nvSpPr>
+        <p:spPr>
+          <a:xfrm>
+            <a:off x="4846320" y="4645152"/>
+            <a:ext cx="3886200" cy="384048"/>
+          </a:xfrm>
+          <a:prstGeom prst="rect">
+            <a:avLst/>
+          </a:prstGeom>
+          <a:noFill/>
+          <a:ln/>
+        </p:spPr>
+        <p:txBody>
+          <a:bodyPr wrap="square" rtlCol="0" anchor="ctr"/>
+          <a:lstStyle/>
+          <a:p>
+            <a:pPr marL="0" indent="0">
+              <a:buNone/>
+            </a:pPr>
+            <a:r>
+              <a:rPr lang="en-US" sz="900" dirty="0">
+                <a:solidFill>
+                  <a:srgbClr val="FFFFFF"/>
+                </a:solidFill>
+              </a:rPr>
+              <a:t>Rubric (% of stage): Data Quality &amp; Provenance 50  ·  Model Resolves Cleanly 33  ·  Lab Cross-Check 17</a:t>
+            </a:r>
+            <a:endParaRPr lang="en-US" sz="900" dirty="0"/>
           </a:p>
         </p:txBody>
       </p:sp>
@@ -25387,7 +28765,7 @@
                 <a:ea typeface="Georgia" pitchFamily="34" charset="-122"/>
                 <a:cs typeface="Georgia" pitchFamily="34" charset="-120"/>
               </a:rPr>
-              <a:t>Stage 1 — Executive Memo  ·  4 Points</a:t>
+              <a:t>Stage 1 — Executive Memo  ·  17% of Project</a:t>
             </a:r>
             <a:endParaRPr lang="en-US" sz="2600" dirty="0"/>
           </a:p>
@@ -26051,7 +29429,7 @@
                   <a:srgbClr val="36454F"/>
                 </a:solidFill>
               </a:rPr>
-              <a:t>Preview Stages 2–4 so the CFO sees the full plan</a:t>
+              <a:t>Preview Stages 2–5 (spec → AI build → live data → validation)</a:t>
             </a:r>
             <a:endParaRPr lang="en-US" sz="1100" dirty="0"/>
           </a:p>
@@ -26302,7 +29680,7 @@
                   <a:srgbClr val="8A9BAD"/>
                 </a:solidFill>
               </a:rPr>
-              <a:t>Commit the .md file to your GitHub repo</a:t>
+              <a:t>Log any AI drafting help in prompt-log.md</a:t>
             </a:r>
             <a:endParaRPr lang="en-US" sz="1100" dirty="0"/>
           </a:p>
@@ -26346,7 +29724,7 @@
                   <a:srgbClr val="8A9BAD"/>
                 </a:solidFill>
               </a:rPr>
-              <a:t>Save to shidler/docs/decisions/ in your repository</a:t>
+              <a:t>Save to docs/decisions/ in your portfolio repo</a:t>
             </a:r>
             <a:endParaRPr lang="en-US" sz="1100" dirty="0"/>
           </a:p>
@@ -26414,7 +29792,7 @@
                   <a:srgbClr val="1E2530"/>
                 </a:solidFill>
               </a:rPr>
-              <a:t>📄  Deliverable: stage1-memo.md  |  Commit to GitHub  |  Save to docs/decisions/</a:t>
+              <a:t>📄  Deliverable: docs/decisions/YYYY-MM-DD-lastname-scenario-hedge-framing.md  |  Commit + push</a:t>
             </a:r>
             <a:endParaRPr lang="en-US" sz="1000" dirty="0"/>
           </a:p>
@@ -26550,7 +29928,7 @@
                 <a:ea typeface="Georgia" pitchFamily="34" charset="-122"/>
                 <a:cs typeface="Georgia" pitchFamily="34" charset="-120"/>
               </a:rPr>
-              <a:t>Stage 2 — Excel Model Build  ·  6 Points</a:t>
+              <a:t>Stage 2 — Model Specification  ·  21% of Project</a:t>
             </a:r>
             <a:endParaRPr lang="en-US" sz="2600" dirty="0"/>
           </a:p>
@@ -26618,7 +29996,7 @@
                   <a:srgbClr val="1E2530"/>
                 </a:solidFill>
               </a:rPr>
-              <a:t>🎯  GOAL  Build a working Excel workbook that computes and compares hedge outcomes. Start from the template in Lamaku.</a:t>
+              <a:t>🎯  GOAL  Using _templates/template-spec.md, write a 2–3 page spec for your workbook — before any Excel exists. Precise enough that an AI could build it from this document alone. In Stage 3, that literally happens.</a:t>
             </a:r>
             <a:endParaRPr lang="en-US" sz="1200" dirty="0"/>
           </a:p>
@@ -26725,7 +30103,7 @@
                   <a:srgbClr val="1E2530"/>
                 </a:solidFill>
               </a:rPr>
-              <a:t>Inputs Section</a:t>
+              <a:t>Named-Range Contract</a:t>
             </a:r>
             <a:endParaRPr lang="en-US" sz="1300" dirty="0"/>
           </a:p>
@@ -26761,7 +30139,7 @@
                   <a:srgbClr val="36454F"/>
                 </a:solidFill>
               </a:rPr>
-              <a:t>All scenario variables in yellow cells with named ranges (FC_AMT, S0_in, F0_in, R_USD, R_FC, K_PUT, K_CALL, PREM_PUT, PREM_CALL, T_DAYS)</a:t>
+              <a:t>Every input with name, placeholder value, unit, and Stage-4 data source: FC_AMT, S0_in, F0_in, R_USD, R_FC, K_PUT, K_CALL, PREM_PUT, PREM_CALL, T_DAYS.</a:t>
             </a:r>
             <a:endParaRPr lang="en-US" sz="1050" dirty="0"/>
           </a:p>
@@ -26868,7 +30246,7 @@
                   <a:srgbClr val="1E2530"/>
                 </a:solidFill>
               </a:rPr>
-              <a:t>Forward &amp; MM Hedge</a:t>
+              <a:t>Tabs + Calculation Flow</a:t>
             </a:r>
             <a:endParaRPr lang="en-US" sz="1300" dirty="0"/>
           </a:p>
@@ -26904,7 +30282,7 @@
                   <a:srgbClr val="36454F"/>
                 </a:solidFill>
               </a:rPr>
-              <a:t>Lock-in via forward rate. Replicate via borrow FC → convert at spot → invest USD. Parity check: forward ≈ MM result.</a:t>
+              <a:t>Name every tab and its purpose. Formula logic in named-range notation, never cell addresses: forward lock-in, 3-step money market with parity check, option payoffs vs S_T. Apply the color key below on every tab.</a:t>
             </a:r>
             <a:endParaRPr lang="en-US" sz="1050" dirty="0"/>
           </a:p>
@@ -27011,7 +30389,7 @@
                   <a:srgbClr val="1E2530"/>
                 </a:solidFill>
               </a:rPr>
-              <a:t>Option Hedges</a:t>
+              <a:t>Validation &amp; Sensitivity Plan</a:t>
             </a:r>
             <a:endParaRPr lang="en-US" sz="1300" dirty="0"/>
           </a:p>
@@ -27047,7 +30425,7 @@
                   <a:srgbClr val="36454F"/>
                 </a:solidFill>
               </a:rPr>
-              <a:t>Put and Call: compute premium cost, show proceeds vs S_T. Include payoff logic. Foundation for sensitivity analysis.</a:t>
+              <a:t>Check figures the finished workbook must pass: parity within rounding, no error cells, every output a formula. Sensitivity: S_T from 0.95×S0 to 1.05×S0 in 1% steps, plus one comparison chart.</a:t>
             </a:r>
             <a:endParaRPr lang="en-US" sz="1050" dirty="0"/>
           </a:p>
@@ -27154,7 +30532,7 @@
                   <a:srgbClr val="1E2530"/>
                 </a:solidFill>
               </a:rPr>
-              <a:t>Sensitivity Table ±5%</a:t>
+              <a:t>The Spec Is the Prompt</a:t>
             </a:r>
             <a:endParaRPr lang="en-US" sz="1300" dirty="0"/>
           </a:p>
@@ -27190,7 +30568,7 @@
                   <a:srgbClr val="36454F"/>
                 </a:solidFill>
               </a:rPr>
-              <a:t>Vary S_T from 0.95×S₀ to 1.05×S₀ in 1% steps. Compare all strategies in one table + chart.</a:t>
+              <a:t>LLM drafts, you edit — log at least one gap you found and fixed in prompt-log.md. Scenario values are placeholders flagged ‘indicative — replaced with live data at Stage 4.’</a:t>
             </a:r>
             <a:endParaRPr lang="en-US" sz="1050" dirty="0"/>
           </a:p>
@@ -27630,7 +31008,7 @@
                 <a:ea typeface="Georgia" pitchFamily="34" charset="-122"/>
                 <a:cs typeface="Georgia" pitchFamily="34" charset="-120"/>
               </a:rPr>
-              <a:t>Stage 3 — Technical Specification  ·  4 Points</a:t>
+              <a:t>Stage 3 — AI-Assisted Build + Audit  ·  17% of Project</a:t>
             </a:r>
             <a:endParaRPr lang="en-US" sz="2200" dirty="0"/>
           </a:p>
@@ -27698,7 +31076,7 @@
                   <a:srgbClr val="1E2530"/>
                 </a:solidFill>
               </a:rPr>
-              <a:t>🎯  GOAL  Using _templates/template-spec.md, produce a 2–3 page spec detailed enough for another analyst — or an AI — to rebuild your model.</a:t>
+              <a:t>🎯  GOAL  Generate the workbook from your Stage 2 spec — any AI tool or by hand — then audit the result. The graded skill is specifying precisely and auditing ruthlessly. No starter template: your spec is the template.</a:t>
             </a:r>
             <a:endParaRPr lang="en-US" sz="1200" dirty="0"/>
           </a:p>
@@ -27734,7 +31112,7 @@
                   <a:srgbClr val="6B8FA3"/>
                 </a:solidFill>
               </a:rPr>
-              <a:t>Required Sections</a:t>
+              <a:t>The Build Contract</a:t>
             </a:r>
             <a:endParaRPr lang="en-US" sz="1500" dirty="0"/>
           </a:p>
@@ -27834,7 +31212,7 @@
                   <a:srgbClr val="1E2530"/>
                 </a:solidFill>
               </a:rPr>
-              <a:t>Problem Statement</a:t>
+              <a:t>All 10 Named Ranges</a:t>
             </a:r>
             <a:endParaRPr lang="en-US" sz="1100" dirty="0"/>
           </a:p>
@@ -27870,7 +31248,7 @@
                   <a:srgbClr val="36454F"/>
                 </a:solidFill>
               </a:rPr>
-              <a:t>Exposure, timing, and risk in professional terms</a:t>
+              <a:t>Each attached to the right cell, exactly per the contract</a:t>
             </a:r>
             <a:endParaRPr lang="en-US" sz="950" dirty="0"/>
           </a:p>
@@ -27970,7 +31348,7 @@
                   <a:srgbClr val="1E2530"/>
                 </a:solidFill>
               </a:rPr>
-              <a:t>Inputs (Named Variables)</a:t>
+              <a:t>Cover Page</a:t>
             </a:r>
             <a:endParaRPr lang="en-US" sz="1100" dirty="0"/>
           </a:p>
@@ -28006,7 +31384,7 @@
                   <a:srgbClr val="36454F"/>
                 </a:solidFill>
               </a:rPr>
-              <a:t>Every variable: name, value, unit, data source</a:t>
+              <a:t>Scenario, author, date, data-provenance block</a:t>
             </a:r>
             <a:endParaRPr lang="en-US" sz="950" dirty="0"/>
           </a:p>
@@ -28106,7 +31484,7 @@
                   <a:srgbClr val="1E2530"/>
                 </a:solidFill>
               </a:rPr>
-              <a:t>Assumptions &amp; Constraints</a:t>
+              <a:t>Three Hedge Families</a:t>
             </a:r>
             <a:endParaRPr lang="en-US" sz="1100" dirty="0"/>
           </a:p>
@@ -28142,7 +31520,7 @@
                   <a:srgbClr val="36454F"/>
                 </a:solidFill>
               </a:rPr>
-              <a:t>Rate basis, transaction costs, parity convention</a:t>
+              <a:t>Forward; money market in 3 explicit steps; put and call vs S_T</a:t>
             </a:r>
             <a:endParaRPr lang="en-US" sz="950" dirty="0"/>
           </a:p>
@@ -28242,7 +31620,7 @@
                   <a:srgbClr val="1E2530"/>
                 </a:solidFill>
               </a:rPr>
-              <a:t>Calculation Flow</a:t>
+              <a:t>Live Validation Checks</a:t>
             </a:r>
             <a:endParaRPr lang="en-US" sz="1100" dirty="0"/>
           </a:p>
@@ -28278,7 +31656,7 @@
                   <a:srgbClr val="36454F"/>
                 </a:solidFill>
               </a:rPr>
-              <a:t>Step-by-step logic for each hedge type</a:t>
+              <a:t>Parity + your spec’s check figures, computed, visible, passing</a:t>
             </a:r>
             <a:endParaRPr lang="en-US" sz="950" dirty="0"/>
           </a:p>
@@ -28378,7 +31756,7 @@
                   <a:srgbClr val="1E2530"/>
                 </a:solidFill>
               </a:rPr>
-              <a:t>Outputs</a:t>
+              <a:t>Formulas, Never Values</a:t>
             </a:r>
             <a:endParaRPr lang="en-US" sz="1100" dirty="0"/>
           </a:p>
@@ -28414,7 +31792,7 @@
                   <a:srgbClr val="36454F"/>
                 </a:solidFill>
               </a:rPr>
-              <a:t>Tables, charts, and summary sections expected</a:t>
+              <a:t>A pasted number where a formula belongs scores zero — checked mechanically</a:t>
             </a:r>
             <a:endParaRPr lang="en-US" sz="950" dirty="0"/>
           </a:p>
@@ -28514,7 +31892,7 @@
                   <a:srgbClr val="1E2530"/>
                 </a:solidFill>
               </a:rPr>
-              <a:t>Model Review</a:t>
+              <a:t>Legend/Key Tab</a:t>
             </a:r>
             <a:endParaRPr lang="en-US" sz="1100" dirty="0"/>
           </a:p>
@@ -28550,7 +31928,7 @@
                   <a:srgbClr val="36454F"/>
                 </a:solidFill>
               </a:rPr>
-              <a:t>What worked, what to improve in the next version</a:t>
+              <a:t>Color convention applied throughout the workbook</a:t>
             </a:r>
             <a:endParaRPr lang="en-US" sz="950" dirty="0"/>
           </a:p>
@@ -28650,7 +32028,7 @@
                   <a:srgbClr val="1E2530"/>
                 </a:solidFill>
               </a:rPr>
-              <a:t>Limitations &amp; Next Steps</a:t>
+              <a:t>Sensitivity Table + Chart</a:t>
             </a:r>
             <a:endParaRPr lang="en-US" sz="1100" dirty="0"/>
           </a:p>
@@ -28686,7 +32064,7 @@
                   <a:srgbClr val="36454F"/>
                 </a:solidFill>
               </a:rPr>
-              <a:t>What's excluded; how this feeds Stage 4</a:t>
+              <a:t>±5% in 1% steps, formula-driven — no hand-typed rows</a:t>
             </a:r>
             <a:endParaRPr lang="en-US" sz="950" dirty="0"/>
           </a:p>
@@ -28754,7 +32132,7 @@
                   <a:srgbClr val="B8975C"/>
                 </a:solidFill>
               </a:rPr>
-              <a:t>Rubric (4 pts): Clarity &amp; Professionalism  ·  Analytical Logic  ·  Completeness  ·  Reproducibility</a:t>
+              <a:t>Audit note required (≥3 findings)  ·  Rubric: Contract Compliance 50%  ·  Structure &amp; Presentation 25%  ·  Audit Note 25%</a:t>
             </a:r>
             <a:endParaRPr lang="en-US" sz="1100" dirty="0"/>
           </a:p>
@@ -28890,7 +32268,7 @@
                 <a:ea typeface="Georgia" pitchFamily="34" charset="-122"/>
                 <a:cs typeface="Georgia" pitchFamily="34" charset="-120"/>
               </a:rPr>
-              <a:t>Stage 4 — Final Analysis + AI Prompt  ·  10 Points</a:t>
+              <a:t>Stage 5 — LLM Analysis &amp; Validation  ·  25%  ·  Capstone</a:t>
             </a:r>
             <a:endParaRPr lang="en-US" sz="2200" dirty="0"/>
           </a:p>
@@ -28958,7 +32336,7 @@
                   <a:srgbClr val="1E2530"/>
                 </a:solidFill>
               </a:rPr>
-              <a:t>🎯  GOAL  Deliver a polished executive memo recommending a hedge strategy, plus a structured AI prompt that could regenerate your spreadsheet.</a:t>
+              <a:t>🎯  GOAL  Feed your spec and market-data memo — and nothing else — to a fresh LLM and let it produce the full analysis. Then verify by hand, reconcile differences, and deliver the recommendation.</a:t>
             </a:r>
             <a:endParaRPr lang="en-US" sz="1200" dirty="0"/>
           </a:p>
@@ -29554,7 +32932,7 @@
                   <a:srgbClr val="36454F"/>
                 </a:solidFill>
               </a:rPr>
-              <a:t>One strategy (or combination) with data support</a:t>
+              <a:t>One strategy (or combination), supported by your live-data numbers</a:t>
             </a:r>
             <a:endParaRPr lang="en-US" sz="950" dirty="0"/>
           </a:p>
@@ -29769,7 +33147,7 @@
                   <a:srgbClr val="B8975C"/>
                 </a:solidFill>
               </a:rPr>
-              <a:t>Section F — AI Prompt (Required)</a:t>
+              <a:t>The Validation Work</a:t>
             </a:r>
             <a:endParaRPr lang="en-US" sz="1300" dirty="0"/>
           </a:p>
@@ -29813,7 +33191,7 @@
                   <a:srgbClr val="8A9BAD"/>
                 </a:solidFill>
               </a:rPr>
-              <a:t>All scenario variables explicitly stated (no inferring)</a:t>
+              <a:t>Fresh LLM session — spec + data memo only; no coaching, log the prompt</a:t>
             </a:r>
             <a:endParaRPr lang="en-US" sz="1050" dirty="0"/>
           </a:p>
@@ -29857,7 +33235,7 @@
                   <a:srgbClr val="8A9BAD"/>
                 </a:solidFill>
               </a:rPr>
-              <a:t>Named ranges matching your Stage 3 spec</a:t>
+              <a:t>Comparison table: LLM vs workbook per strategy; diagnose every gap</a:t>
             </a:r>
             <a:endParaRPr lang="en-US" sz="1050" dirty="0"/>
           </a:p>
@@ -29901,7 +33279,7 @@
                   <a:srgbClr val="8A9BAD"/>
                 </a:solidFill>
               </a:rPr>
-              <a:t>Color coding: Yellow/Blue/Green/Gray convention</a:t>
+              <a:t>Hand-verify ≥3 outcomes with arithmetic shown — no Excel</a:t>
             </a:r>
             <a:endParaRPr lang="en-US" sz="1050" dirty="0"/>
           </a:p>
@@ -29945,7 +33323,7 @@
                   <a:srgbClr val="8A9BAD"/>
                 </a:solidFill>
               </a:rPr>
-              <a:t>Hierarchical headers: # GOAL · # INPUTS · # LOGIC</a:t>
+              <a:t>Recommendation memo (A–E) built on the verified numbers</a:t>
             </a:r>
             <a:endParaRPr lang="en-US" sz="1050" dirty="0"/>
           </a:p>
@@ -29989,7 +33367,7 @@
                   <a:srgbClr val="8A9BAD"/>
                 </a:solidFill>
               </a:rPr>
-              <a:t>Forward, MM hedge (3-step), Options, Sensitivity</a:t>
+              <a:t>Spec retrospective: what the LLM had to guess — candor is graded</a:t>
             </a:r>
             <a:endParaRPr lang="en-US" sz="1050" dirty="0"/>
           </a:p>
@@ -30033,7 +33411,7 @@
                   <a:srgbClr val="8A9BAD"/>
                 </a:solidFill>
               </a:rPr>
-              <a:t>Verification checks: parity, named ranges, formulas</a:t>
+              <a:t>Repo polish: README, prompt log, public repo</a:t>
             </a:r>
             <a:endParaRPr lang="en-US" sz="1050" dirty="0"/>
           </a:p>
@@ -30101,7 +33479,7 @@
                   <a:srgbClr val="1E2530"/>
                 </a:solidFill>
               </a:rPr>
-              <a:t>⭐  +2 EC  Discuss AI Automation, Multi-File Reasoning, GitHub audit trails, or Hedge Accounting</a:t>
+              <a:t>⭐  Optional further study (ungraded): AI automation  ·  multi-file reasoning  ·  GitHub as audit evidence  ·  hedge accounting</a:t>
             </a:r>
             <a:endParaRPr lang="en-US" sz="950" dirty="0"/>
           </a:p>
@@ -30169,7 +33547,7 @@
                   <a:srgbClr val="FFFFFF"/>
                 </a:solidFill>
               </a:rPr>
-              <a:t>Rubric: Interpretation 2 · Recommendation 2 · Sensitivity 1 · AI Prompt 2 · Communication 1 · Output 2</a:t>
+              <a:t>Rubric (% of stage): LLM Run &amp; Comparison 25  ·  Hand Verification 25  ·  Recommendation 25  ·  Retrospective 17  ·  Repo Polish 8</a:t>
             </a:r>
             <a:endParaRPr lang="en-US" sz="900" dirty="0"/>
           </a:p>
@@ -30637,7 +34015,7 @@
                   <a:srgbClr val="FFFFFF"/>
                 </a:solidFill>
               </a:rPr>
-              <a:t>Excel</a:t>
+              <a:t>Formal</a:t>
             </a:r>
             <a:endParaRPr lang="en-US" sz="1000" dirty="0"/>
           </a:p>
@@ -30651,7 +34029,7 @@
                   <a:srgbClr val="FFFFFF"/>
                 </a:solidFill>
               </a:rPr>
-              <a:t>Prototype</a:t>
+              <a:t>Spec</a:t>
             </a:r>
             <a:endParaRPr lang="en-US" sz="1000" dirty="0"/>
           </a:p>
@@ -30828,7 +34206,7 @@
                   <a:srgbClr val="FFFFFF"/>
                 </a:solidFill>
               </a:rPr>
-              <a:t>Formal</a:t>
+              <a:t>AI Build</a:t>
             </a:r>
             <a:endParaRPr lang="en-US" sz="1000" dirty="0"/>
           </a:p>
@@ -30842,7 +34220,7 @@
                   <a:srgbClr val="FFFFFF"/>
                 </a:solidFill>
               </a:rPr>
-              <a:t>Spec</a:t>
+              <a:t>+ Audit</a:t>
             </a:r>
             <a:endParaRPr lang="en-US" sz="1000" dirty="0"/>
           </a:p>
@@ -31019,7 +34397,7 @@
                   <a:srgbClr val="FFFFFF"/>
                 </a:solidFill>
               </a:rPr>
-              <a:t>AI Prompt</a:t>
+              <a:t>Live Market</a:t>
             </a:r>
             <a:endParaRPr lang="en-US" sz="1000" dirty="0"/>
           </a:p>
@@ -31033,7 +34411,7 @@
                   <a:srgbClr val="FFFFFF"/>
                 </a:solidFill>
               </a:rPr>
-              <a:t>&amp; Analysis</a:t>
+              <a:t>Data</a:t>
             </a:r>
             <a:endParaRPr lang="en-US" sz="1000" dirty="0"/>
           </a:p>
@@ -31194,7 +34572,7 @@
                   <a:srgbClr val="8A9BAD"/>
                 </a:solidFill>
               </a:rPr>
-              <a:t>Deliverable</a:t>
+              <a:t>Stage 5</a:t>
             </a:r>
             <a:endParaRPr lang="en-US" sz="1000" dirty="0"/>
           </a:p>
@@ -31301,7 +34679,7 @@
                   <a:srgbClr val="B8975C"/>
                 </a:solidFill>
               </a:rPr>
-              <a:t>Build First</a:t>
+              <a:t>Spec Before Build</a:t>
             </a:r>
             <a:endParaRPr lang="en-US" sz="1300" dirty="0"/>
           </a:p>
@@ -31337,7 +34715,7 @@
                   <a:srgbClr val="8A9BAD"/>
                 </a:solidFill>
               </a:rPr>
-              <a:t>Building the model before writing the spec gives you real knowledge of which inputs matter most.</a:t>
+              <a:t>You design the workbook — named ranges, tabs, formula plan — before any Excel exists. The build then tests your own design.</a:t>
             </a:r>
             <a:endParaRPr lang="en-US" sz="1100" dirty="0"/>
           </a:p>
@@ -31444,7 +34822,7 @@
                   <a:srgbClr val="6B8FA3"/>
                 </a:solidFill>
               </a:rPr>
-              <a:t>Spec After Build</a:t>
+              <a:t>AI Generates, You Audit</a:t>
             </a:r>
             <a:endParaRPr lang="en-US" sz="1300" dirty="0"/>
           </a:p>
@@ -31480,7 +34858,7 @@
                   <a:srgbClr val="8A9BAD"/>
                 </a:solidFill>
               </a:rPr>
-              <a:t>Post-build specs are more precise, realistic, and useful as AI prompt inputs than pre-build specs.</a:t>
+              <a:t>AI does the assembly from your spec. The graded skill is auditing the output — the thing an analyst still owns.</a:t>
             </a:r>
             <a:endParaRPr lang="en-US" sz="1100" dirty="0"/>
           </a:p>
@@ -31587,7 +34965,7 @@
                   <a:srgbClr val="B8975C"/>
                 </a:solidFill>
               </a:rPr>
-              <a:t>Prompt = Machine Instructions</a:t>
+              <a:t>Data After Structure</a:t>
             </a:r>
             <a:endParaRPr lang="en-US" sz="1300" dirty="0"/>
           </a:p>
@@ -31623,7 +35001,7 @@
                   <a:srgbClr val="8A9BAD"/>
                 </a:solidFill>
               </a:rPr>
-              <a:t>Your spec's named ranges, calculation flow, and output requirements translate directly into an AI-executable prompt.</a:t>
+              <a:t>Live market data lands last, as a robustness test: a model that breaks when fresh prices load had the wrong structure.</a:t>
             </a:r>
             <a:endParaRPr lang="en-US" sz="1100" dirty="0"/>
           </a:p>
@@ -33019,7 +36397,7 @@
                   <a:srgbClr val="8A9BAD"/>
                 </a:solidFill>
               </a:rPr>
-              <a:t>Current EURUSD spot · USD 1-year interest rate · EUR 1-year interest rate  |  Record date and source in your Stage 2 model.</a:t>
+              <a:t>Current EURUSD spot · USD 1-year interest rate · EUR 1-year interest rate  |  Indicative placeholders in your Stage 2 spec; live values with source + timestamp at Stage 4.</a:t>
             </a:r>
             <a:endParaRPr lang="en-US" sz="1100" dirty="0"/>
           </a:p>
